--- a/HotStock_VPB_31July2026.pptx
+++ b/HotStock_VPB_31July2026.pptx
@@ -11,6 +11,7 @@
     <p:sldId id="375" r:id="rId6"/>
     <p:sldId id="381" r:id="rId7"/>
     <p:sldId id="383" r:id="rId8"/>
+    <p:sldId id="385" r:id="rId17"/>
     <p:sldId id="378" r:id="rId10"/>
   </p:sldIdLst>
   <p:sldSz cx="10287000" cy="13716000"/>
@@ -147,7 +148,6 @@
   <c:date1904 val="0"/>
   <c:lang val="en-US"/>
   <c:roundedCorners val="0"/>
-  <c:clrMapOvr bg1="lt1" tx1="dk1" bg2="lt2" tx2="dk2" accent1="accent1" accent2="accent2" accent3="accent3" accent4="accent4" accent5="accent5" accent6="accent6" hlink="hlink" folHlink="folHlink"/>
   <c:chart>
     <c:title>
       <c:tx>
@@ -158,10 +158,7 @@
             <a:pPr>
               <a:defRPr sz="2000" b="0" i="0" u="none" strike="noStrike" kern="1200" spc="0" baseline="0">
                 <a:solidFill>
-                  <a:schemeClr val="tx1">
-                    <a:lumMod val="65000"/>
-                    <a:lumOff val="35000"/>
-                  </a:schemeClr>
+                  <a:srgbClr val="595959"/>
                 </a:solidFill>
                 <a:latin typeface="Noto Sans" panose="020B0502040504020204" pitchFamily="34" charset="0"/>
                 <a:ea typeface="Noto Sans" panose="020B0502040504020204" pitchFamily="34" charset="0"/>
@@ -198,10 +195,7 @@
           <a:pPr>
             <a:defRPr sz="2000" b="0" i="0" u="none" strike="noStrike" kern="1200" baseline="0">
               <a:solidFill>
-                <a:schemeClr val="tx1">
-                  <a:lumMod val="65000"/>
-                  <a:lumOff val="35000"/>
-                </a:schemeClr>
+                <a:srgbClr val="595959"/>
               </a:solidFill>
               <a:latin typeface="Noto Sans" panose="020B0502040504020204" pitchFamily="34" charset="0"/>
               <a:ea typeface="Noto Sans" panose="020B0502040504020204" pitchFamily="34" charset="0"/>
@@ -223,11 +217,19 @@
           <c:idx val="0"/>
           <c:order val="0"/>
           <c:tx>
-            <c:v>LNTT hợp nhất</c:v>
+            <c:strRef>
+              <c:f>Sheet1!$A$2</c:f>
+              <c:strCache>
+                <c:ptCount val="1"/>
+                <c:pt idx="0">
+                  <c:v>LNTT hợp nhất</c:v>
+                </c:pt>
+              </c:strCache>
+            </c:strRef>
           </c:tx>
           <c:spPr>
             <a:solidFill>
-              <a:schemeClr val="accent1"/>
+              <a:srgbClr val="F0B26B"/>
             </a:solidFill>
             <a:ln>
               <a:noFill/>
@@ -241,7 +243,7 @@
             <c:bubble3D val="0"/>
             <c:spPr>
               <a:solidFill>
-                <a:schemeClr val="accent1"/>
+                <a:srgbClr val="F0B26B"/>
               </a:solidFill>
               <a:ln>
                 <a:noFill/>
@@ -255,7 +257,7 @@
             <c:bubble3D val="0"/>
             <c:spPr>
               <a:solidFill>
-                <a:schemeClr val="accent1"/>
+                <a:srgbClr val="F0B26B"/>
               </a:solidFill>
               <a:ln>
                 <a:noFill/>
@@ -269,7 +271,7 @@
             <c:bubble3D val="0"/>
             <c:spPr>
               <a:solidFill>
-                <a:schemeClr val="accent1"/>
+                <a:srgbClr val="F0B26B"/>
               </a:solidFill>
               <a:ln>
                 <a:noFill/>
@@ -283,7 +285,7 @@
             <c:bubble3D val="0"/>
             <c:spPr>
               <a:solidFill>
-                <a:schemeClr val="accent1"/>
+                <a:srgbClr val="F0B26B"/>
               </a:solidFill>
               <a:ln>
                 <a:noFill/>
@@ -297,7 +299,7 @@
             <c:bubble3D val="0"/>
             <c:spPr>
               <a:solidFill>
-                <a:schemeClr val="accent3"/>
+                <a:srgbClr val="043B72"/>
               </a:solidFill>
               <a:ln>
                 <a:noFill/>
@@ -311,7 +313,7 @@
             <c:bubble3D val="0"/>
             <c:spPr>
               <a:solidFill>
-                <a:schemeClr val="accent3"/>
+                <a:srgbClr val="043B72"/>
               </a:solidFill>
               <a:ln>
                 <a:noFill/>
@@ -320,6 +322,7 @@
             </c:spPr>
           </c:dPt>
           <c:dLbls>
+            <c:numFmt formatCode="#,##0" sourceLinked="0"/>
             <c:spPr>
               <a:noFill/>
               <a:ln>
@@ -334,10 +337,7 @@
                 <a:pPr>
                   <a:defRPr sz="1600" b="1" i="0" u="none" strike="noStrike" kern="1200" baseline="0">
                     <a:solidFill>
-                      <a:schemeClr val="tx1">
-                        <a:lumMod val="65000"/>
-                        <a:lumOff val="35000"/>
-                      </a:schemeClr>
+                      <a:srgbClr val="595959"/>
                     </a:solidFill>
                     <a:latin typeface="Noto Sans" panose="020B0502040504020204" pitchFamily="34" charset="0"/>
                     <a:ea typeface="Noto Sans" panose="020B0502040504020204" pitchFamily="34" charset="0"/>
@@ -429,10 +429,7 @@
           <a:noFill/>
           <a:ln w="9525" cap="flat" cmpd="sng" algn="ctr">
             <a:solidFill>
-              <a:schemeClr val="tx1">
-                <a:lumMod val="15000"/>
-                <a:lumOff val="85000"/>
-              </a:schemeClr>
+              <a:srgbClr val="D9D9D9"/>
             </a:solidFill>
             <a:round/>
           </a:ln>
@@ -445,10 +442,7 @@
             <a:pPr>
               <a:defRPr sz="2000" b="0" i="0" u="none" strike="noStrike" kern="1200" baseline="0">
                 <a:solidFill>
-                  <a:schemeClr val="tx1">
-                    <a:lumMod val="65000"/>
-                    <a:lumOff val="35000"/>
-                  </a:schemeClr>
+                  <a:srgbClr val="595959"/>
                 </a:solidFill>
                 <a:latin typeface="Noto Sans" panose="020B0502040504020204" pitchFamily="34" charset="0"/>
                 <a:ea typeface="Noto Sans" panose="020B0502040504020204" pitchFamily="34" charset="0"/>
@@ -491,10 +485,7 @@
             <a:pPr>
               <a:defRPr sz="2000" b="0" i="0" u="none" strike="noStrike" kern="1200" baseline="0">
                 <a:solidFill>
-                  <a:schemeClr val="tx1">
-                    <a:lumMod val="65000"/>
-                    <a:lumOff val="35000"/>
-                  </a:schemeClr>
+                  <a:srgbClr val="595959"/>
                 </a:solidFill>
                 <a:latin typeface="Noto Sans" panose="020B0502040504020204" pitchFamily="34" charset="0"/>
                 <a:ea typeface="Noto Sans" panose="020B0502040504020204" pitchFamily="34" charset="0"/>
@@ -543,6 +534,363 @@
       <a:endParaRPr lang="en-US"/>
     </a:p>
   </c:txPr>
+</c:chartSpace>
+</file>
+
+<file path=ppt/charts/chart5.xml><?xml version="1.0" encoding="utf-8"?>
+<c:chartSpace xmlns:c="http://schemas.openxmlformats.org/drawingml/2006/chart" xmlns:a="http://schemas.openxmlformats.org/drawingml/2006/main" xmlns:r="http://schemas.openxmlformats.org/officeDocument/2006/relationships">
+  <c:date1904 val="0"/>
+  <c:lang val="en-US"/>
+  <c:roundedCorners val="0"/>
+  <c:chart>
+    <c:title>
+      <c:tx>
+        <c:rich>
+          <a:bodyPr rot="0" spcFirstLastPara="1" vertOverflow="ellipsis" vert="horz" wrap="square" anchor="ctr" anchorCtr="1"/>
+          <a:lstStyle/>
+          <a:p>
+            <a:pPr>
+              <a:defRPr sz="2000" b="0" i="0" u="none" strike="noStrike" kern="1200" spc="0" baseline="0">
+                <a:solidFill>
+                  <a:srgbClr val="595959"/>
+                </a:solidFill>
+                <a:latin typeface="Noto Sans" panose="020B0502040504020204" pitchFamily="34" charset="0"/>
+                <a:ea typeface="Noto Sans" panose="020B0502040504020204" pitchFamily="34" charset="0"/>
+                <a:cs typeface="+mn-cs"/>
+              </a:defRPr>
+            </a:pPr>
+            <a:r>
+              <a:rPr lang="vi-VN" sz="2000" dirty="0"/>
+              <a:t>(tỷ đồng)</a:t>
+            </a:r>
+          </a:p>
+        </c:rich>
+      </c:tx>
+      <c:layout>
+        <c:manualLayout>
+          <c:xMode val="edge"/>
+          <c:yMode val="edge"/>
+          <c:x val="4.5311773634288392E-2"/>
+          <c:y val="5.2450331681392921E-3"/>
+        </c:manualLayout>
+      </c:layout>
+      <c:overlay val="0"/>
+      <c:spPr>
+        <a:noFill/>
+        <a:ln>
+          <a:noFill/>
+        </a:ln>
+        <a:effectLst/>
+      </c:spPr>
+      <c:txPr>
+        <a:bodyPr rot="0" spcFirstLastPara="1" vertOverflow="ellipsis" vert="horz" wrap="square" anchor="ctr" anchorCtr="1"/>
+        <a:lstStyle/>
+        <a:p>
+          <a:pPr>
+            <a:defRPr sz="2000" b="0" i="0" u="none" strike="noStrike" kern="1200" baseline="0">
+              <a:solidFill>
+                <a:srgbClr val="595959"/>
+              </a:solidFill>
+              <a:latin typeface="Noto Sans" panose="020B0502040504020204" pitchFamily="34" charset="0"/>
+              <a:ea typeface="Noto Sans" panose="020B0502040504020204" pitchFamily="34" charset="0"/>
+              <a:cs typeface="+mn-cs"/>
+            </a:defRPr>
+          </a:pPr>
+          <a:endParaRPr lang="en-US"/>
+        </a:p>
+      </c:txPr>
+    </c:title>
+    <c:autoTitleDeleted val="0"/>
+    <c:plotArea>
+      <c:layout/>
+      <c:barChart>
+        <c:barDir val="col"/>
+        <c:grouping val="clustered"/>
+        <c:varyColors val="0"/>
+        <c:ser>
+          <c:idx val="0"/>
+          <c:order val="0"/>
+          <c:tx>
+            <c:strRef>
+              <c:f>Sheet1!$A$2</c:f>
+              <c:strCache>
+                <c:ptCount val="1"/>
+                <c:pt idx="0">
+                  <c:v>LNTT hợp nhất</c:v>
+                </c:pt>
+              </c:strCache>
+            </c:strRef>
+          </c:tx>
+          <c:spPr>
+            <a:solidFill>
+              <a:srgbClr val="F0B26B"/>
+            </a:solidFill>
+            <a:ln>
+              <a:noFill/>
+            </a:ln>
+            <a:effectLst/>
+          </c:spPr>
+          <c:invertIfNegative val="0"/>
+          <c:dPt>
+            <c:idx val="0"/>
+            <c:invertIfNegative val="0"/>
+            <c:bubble3D val="0"/>
+            <c:spPr>
+              <a:solidFill>
+                <a:srgbClr val="F0B26B"/>
+              </a:solidFill>
+              <a:ln>
+                <a:noFill/>
+              </a:ln>
+              <a:effectLst/>
+            </c:spPr>
+          </c:dPt>
+          <c:dPt>
+            <c:idx val="1"/>
+            <c:invertIfNegative val="0"/>
+            <c:bubble3D val="0"/>
+            <c:spPr>
+              <a:solidFill>
+                <a:srgbClr val="F0B26B"/>
+              </a:solidFill>
+              <a:ln>
+                <a:noFill/>
+              </a:ln>
+              <a:effectLst/>
+            </c:spPr>
+          </c:dPt>
+          <c:dPt>
+            <c:idx val="2"/>
+            <c:invertIfNegative val="0"/>
+            <c:bubble3D val="0"/>
+            <c:spPr>
+              <a:solidFill>
+                <a:srgbClr val="043B72"/>
+              </a:solidFill>
+              <a:ln>
+                <a:noFill/>
+              </a:ln>
+              <a:effectLst/>
+            </c:spPr>
+          </c:dPt>
+          <c:dPt>
+            <c:idx val="3"/>
+            <c:invertIfNegative val="0"/>
+            <c:bubble3D val="0"/>
+            <c:spPr>
+              <a:solidFill>
+                <a:srgbClr val="8DC8E8"/>
+              </a:solidFill>
+              <a:ln>
+                <a:noFill/>
+              </a:ln>
+              <a:effectLst/>
+            </c:spPr>
+          </c:dPt>
+          <c:dLbls>
+            <c:numFmt formatCode="#,##0" sourceLinked="0"/>
+            <c:spPr>
+              <a:noFill/>
+              <a:ln>
+                <a:noFill/>
+              </a:ln>
+              <a:effectLst/>
+            </c:spPr>
+            <c:txPr>
+              <a:bodyPr rot="0" spcFirstLastPara="1" vertOverflow="ellipsis" vert="horz" wrap="square" anchor="ctr" anchorCtr="1"/>
+              <a:lstStyle/>
+              <a:p>
+                <a:pPr>
+                  <a:defRPr sz="1600" b="1" i="0" u="none" strike="noStrike" kern="1200" baseline="0">
+                    <a:solidFill>
+                      <a:srgbClr val="595959"/>
+                    </a:solidFill>
+                    <a:latin typeface="Noto Sans" panose="020B0502040504020204" pitchFamily="34" charset="0"/>
+                    <a:ea typeface="Noto Sans" panose="020B0502040504020204" pitchFamily="34" charset="0"/>
+                    <a:cs typeface="+mn-cs"/>
+                  </a:defRPr>
+                </a:pPr>
+                <a:endParaRPr lang="en-US"/>
+              </a:p>
+            </c:txPr>
+            <c:dLblPos val="outEnd"/>
+            <c:showLegendKey val="0"/>
+            <c:showVal val="1"/>
+            <c:showCatName val="0"/>
+            <c:showSerName val="0"/>
+            <c:showPercent val="0"/>
+            <c:showBubbleSize val="0"/>
+          </c:dLbls>
+          <c:cat>
+            <c:strRef>
+              <c:f>Sheet1!$B$1:$E$1</c:f>
+              <c:strCache>
+                <c:ptCount val="4"/>
+                <c:pt idx="0">
+                  <c:v>1H25</c:v>
+                </c:pt>
+                <c:pt idx="1">
+                  <c:v>2H25</c:v>
+                </c:pt>
+                <c:pt idx="2">
+                  <c:v>1H26</c:v>
+                </c:pt>
+                <c:pt idx="3">
+                  <c:v>2H26 cần để đạt KH</c:v>
+                </c:pt>
+              </c:strCache>
+            </c:strRef>
+          </c:cat>
+          <c:val>
+            <c:numRef>
+              <c:f>Sheet1!$B$2:$E$2</c:f>
+              <c:numCache>
+                <c:formatCode>#,##0</c:formatCode>
+                <c:ptCount val="4"/>
+                <c:pt idx="0">
+                  <c:v>11240</c:v>
+                </c:pt>
+                <c:pt idx="1">
+                  <c:v>19360</c:v>
+                </c:pt>
+                <c:pt idx="2">
+                  <c:v>18880</c:v>
+                </c:pt>
+                <c:pt idx="3">
+                  <c:v>22443</c:v>
+                </c:pt>
+              </c:numCache>
+            </c:numRef>
+          </c:val>
+        </c:ser>
+        <c:gapWidth val="70"/>
+        <c:overlap val="-27"/>
+        <c:axId val="811334001"/>
+        <c:axId val="811334002"/>
+      </c:barChart>
+      <c:catAx>
+        <c:axId val="811334001"/>
+        <c:scaling>
+          <c:orientation val="minMax"/>
+        </c:scaling>
+        <c:delete val="0"/>
+        <c:axPos val="b"/>
+        <c:numFmt formatCode="General" sourceLinked="1"/>
+        <c:majorTickMark val="none"/>
+        <c:minorTickMark val="none"/>
+        <c:tickLblPos val="low"/>
+        <c:spPr>
+          <a:noFill/>
+          <a:ln w="9525" cap="flat" cmpd="sng" algn="ctr">
+            <a:solidFill>
+              <a:srgbClr val="D9D9D9"/>
+            </a:solidFill>
+            <a:round/>
+          </a:ln>
+          <a:effectLst/>
+        </c:spPr>
+        <c:txPr>
+          <a:bodyPr rot="-60000000" spcFirstLastPara="1" vertOverflow="ellipsis" vert="horz" wrap="square" anchor="ctr" anchorCtr="1"/>
+          <a:lstStyle/>
+          <a:p>
+            <a:pPr>
+              <a:defRPr sz="1400" b="0" i="0" u="none" strike="noStrike" kern="1200" baseline="0">
+                <a:solidFill>
+                  <a:srgbClr val="595959"/>
+                </a:solidFill>
+                <a:latin typeface="Noto Sans" panose="020B0502040504020204" pitchFamily="34" charset="0"/>
+                <a:ea typeface="Noto Sans" panose="020B0502040504020204" pitchFamily="34" charset="0"/>
+                <a:cs typeface="+mn-cs"/>
+              </a:defRPr>
+            </a:pPr>
+            <a:endParaRPr lang="en-US"/>
+          </a:p>
+        </c:txPr>
+        <c:crossAx val="811334002"/>
+        <c:crosses val="autoZero"/>
+        <c:auto val="1"/>
+        <c:lblAlgn val="ctr"/>
+        <c:lblOffset val="100"/>
+        <c:noMultiLvlLbl val="0"/>
+      </c:catAx>
+      <c:valAx>
+        <c:axId val="811334002"/>
+        <c:scaling>
+          <c:orientation val="minMax"/>
+          <c:min val="0"/>
+        </c:scaling>
+        <c:delete val="0"/>
+        <c:axPos val="l"/>
+        <c:numFmt formatCode="#,##0" sourceLinked="0"/>
+        <c:majorTickMark val="none"/>
+        <c:minorTickMark val="none"/>
+        <c:tickLblPos val="nextTo"/>
+        <c:spPr>
+          <a:noFill/>
+          <a:ln>
+            <a:noFill/>
+          </a:ln>
+          <a:effectLst/>
+        </c:spPr>
+        <c:txPr>
+          <a:bodyPr rot="-60000000" spcFirstLastPara="1" vertOverflow="ellipsis" vert="horz" wrap="square" anchor="ctr" anchorCtr="1"/>
+          <a:lstStyle/>
+          <a:p>
+            <a:pPr>
+              <a:defRPr sz="2000" b="0" i="0" u="none" strike="noStrike" kern="1200" baseline="0">
+                <a:solidFill>
+                  <a:srgbClr val="595959"/>
+                </a:solidFill>
+                <a:latin typeface="Noto Sans" panose="020B0502040504020204" pitchFamily="34" charset="0"/>
+                <a:ea typeface="Noto Sans" panose="020B0502040504020204" pitchFamily="34" charset="0"/>
+                <a:cs typeface="+mn-cs"/>
+              </a:defRPr>
+            </a:pPr>
+            <a:endParaRPr lang="en-US"/>
+          </a:p>
+        </c:txPr>
+        <c:crossAx val="811334001"/>
+        <c:crosses val="autoZero"/>
+        <c:crossBetween val="between"/>
+        <c:majorUnit val="5000"/>
+      </c:valAx>
+      <c:spPr>
+        <a:noFill/>
+        <a:ln>
+          <a:noFill/>
+        </a:ln>
+        <a:effectLst/>
+      </c:spPr>
+    </c:plotArea>
+    <c:plotVisOnly val="1"/>
+    <c:dispBlanksAs val="gap"/>
+    <c:showDLblsOverMax val="0"/>
+  </c:chart>
+  <c:spPr>
+    <a:noFill/>
+    <a:ln w="9525" cap="flat" cmpd="sng" algn="ctr">
+      <a:noFill/>
+      <a:round/>
+    </a:ln>
+    <a:effectLst/>
+  </c:spPr>
+  <c:txPr>
+    <a:bodyPr/>
+    <a:lstStyle/>
+    <a:p>
+      <a:pPr>
+        <a:defRPr sz="2000">
+          <a:latin typeface="Noto Sans" panose="020B0502040504020204" pitchFamily="34" charset="0"/>
+          <a:ea typeface="Noto Sans" panose="020B0502040504020204" pitchFamily="34" charset="0"/>
+          <a:cs typeface="+mn-cs"/>
+        </a:defRPr>
+      </a:pPr>
+      <a:endParaRPr lang="en-US"/>
+    </a:p>
+  </c:txPr>
+  <c:externalData r:id="rId1">
+    <c:autoUpdate val="0"/>
+  </c:externalData>
 </c:chartSpace>
 </file>
 
@@ -9051,6 +9399,539 @@
 </p:sldMaster>
 </file>
 
+<file path=ppt/slides/slide10.xml><?xml version="1.0" encoding="utf-8"?>
+<p:sld xmlns:a="http://schemas.openxmlformats.org/drawingml/2006/main" xmlns:p="http://schemas.openxmlformats.org/presentationml/2006/main" xmlns:r="http://schemas.openxmlformats.org/officeDocument/2006/relationships">
+  <p:cSld>
+    <p:spTree>
+      <p:nvGrpSpPr>
+        <p:cNvPr id="1" name=""/>
+        <p:cNvGrpSpPr/>
+        <p:nvPr/>
+      </p:nvGrpSpPr>
+      <p:grpSpPr/>
+      <p:pic>
+        <p:nvPicPr>
+          <p:cNvPr id="6" name="Picture 5" descr="A white rectangle with pink border&#10;&#10;Description automatically generated">
+            <a:extLst>
+              <a:ext uri="{FF2B5EF4-FFF2-40B4-BE49-F238E27FC236}">
+                <a16:creationId xmlns:a16="http://schemas.microsoft.com/office/drawing/2014/main" id="{E28BF981-17E9-B1F5-F8D5-3BFE81077E0E}"/>
+              </a:ext>
+            </a:extLst>
+          </p:cNvPr>
+          <p:cNvPicPr>
+            <a:picLocks noGrp="1" noRot="1" noChangeAspect="1" noMove="1" noResize="1" noEditPoints="1" noAdjustHandles="1" noChangeArrowheads="1" noChangeShapeType="1" noCrop="1"/>
+          </p:cNvPicPr>
+          <p:nvPr/>
+        </p:nvPicPr>
+        <p:blipFill>
+          <a:blip r:embed="rId2">
+            <a:extLst>
+              <a:ext uri="{28A0092B-C50C-407E-A947-70E740481C1C}">
+                <a14:useLocalDpi xmlns:a14="http://schemas.microsoft.com/office/drawing/2010/main" val="0"/>
+              </a:ext>
+            </a:extLst>
+          </a:blip>
+          <a:stretch>
+            <a:fillRect/>
+          </a:stretch>
+        </p:blipFill>
+        <p:spPr>
+          <a:xfrm>
+            <a:off x="0" y="0"/>
+            <a:ext cx="10287000" cy="13716000"/>
+          </a:xfrm>
+          <a:prstGeom prst="rect">
+            <a:avLst/>
+          </a:prstGeom>
+        </p:spPr>
+      </p:pic>
+      <p:sp>
+        <p:nvSpPr>
+          <p:cNvPr id="4" name="Freeform: Shape 3">
+            <a:extLst>
+              <a:ext uri="{FF2B5EF4-FFF2-40B4-BE49-F238E27FC236}">
+                <a16:creationId xmlns:a16="http://schemas.microsoft.com/office/drawing/2014/main" id="{55EAFF75-477A-37F1-48F6-130C019EA774}"/>
+              </a:ext>
+            </a:extLst>
+          </p:cNvPr>
+          <p:cNvSpPr/>
+          <p:nvPr/>
+        </p:nvSpPr>
+        <p:spPr>
+          <a:xfrm>
+            <a:off x="586534" y="668818"/>
+            <a:ext cx="9113926" cy="1177680"/>
+          </a:xfrm>
+          <a:custGeom>
+            <a:avLst/>
+            <a:gdLst>
+              <a:gd name="connsiteX0" fmla="*/ 525894 w 9113926"/>
+              <a:gd name="connsiteY0" fmla="*/ 0 h 1177680"/>
+              <a:gd name="connsiteX1" fmla="*/ 8588032 w 9113926"/>
+              <a:gd name="connsiteY1" fmla="*/ 0 h 1177680"/>
+              <a:gd name="connsiteX2" fmla="*/ 9113925 w 9113926"/>
+              <a:gd name="connsiteY2" fmla="*/ 525893 h 1177680"/>
+              <a:gd name="connsiteX3" fmla="*/ 9113925 w 9113926"/>
+              <a:gd name="connsiteY3" fmla="*/ 609084 h 1177680"/>
+              <a:gd name="connsiteX4" fmla="*/ 9113926 w 9113926"/>
+              <a:gd name="connsiteY4" fmla="*/ 609084 h 1177680"/>
+              <a:gd name="connsiteX5" fmla="*/ 9113926 w 9113926"/>
+              <a:gd name="connsiteY5" fmla="*/ 1177679 h 1177680"/>
+              <a:gd name="connsiteX6" fmla="*/ 8588042 w 9113926"/>
+              <a:gd name="connsiteY6" fmla="*/ 1177679 h 1177680"/>
+              <a:gd name="connsiteX7" fmla="*/ 8588032 w 9113926"/>
+              <a:gd name="connsiteY7" fmla="*/ 1177680 h 1177680"/>
+              <a:gd name="connsiteX8" fmla="*/ 525894 w 9113926"/>
+              <a:gd name="connsiteY8" fmla="*/ 1177680 h 1177680"/>
+              <a:gd name="connsiteX9" fmla="*/ 525884 w 9113926"/>
+              <a:gd name="connsiteY9" fmla="*/ 1177679 h 1177680"/>
+              <a:gd name="connsiteX10" fmla="*/ 0 w 9113926"/>
+              <a:gd name="connsiteY10" fmla="*/ 1177679 h 1177680"/>
+              <a:gd name="connsiteX11" fmla="*/ 0 w 9113926"/>
+              <a:gd name="connsiteY11" fmla="*/ 609084 h 1177680"/>
+              <a:gd name="connsiteX12" fmla="*/ 1 w 9113926"/>
+              <a:gd name="connsiteY12" fmla="*/ 609084 h 1177680"/>
+              <a:gd name="connsiteX13" fmla="*/ 1 w 9113926"/>
+              <a:gd name="connsiteY13" fmla="*/ 525893 h 1177680"/>
+              <a:gd name="connsiteX14" fmla="*/ 525894 w 9113926"/>
+              <a:gd name="connsiteY14" fmla="*/ 0 h 1177680"/>
+            </a:gdLst>
+            <a:ahLst/>
+            <a:cxnLst>
+              <a:cxn ang="0">
+                <a:pos x="connsiteX0" y="connsiteY0"/>
+              </a:cxn>
+              <a:cxn ang="0">
+                <a:pos x="connsiteX1" y="connsiteY1"/>
+              </a:cxn>
+              <a:cxn ang="0">
+                <a:pos x="connsiteX2" y="connsiteY2"/>
+              </a:cxn>
+              <a:cxn ang="0">
+                <a:pos x="connsiteX3" y="connsiteY3"/>
+              </a:cxn>
+              <a:cxn ang="0">
+                <a:pos x="connsiteX4" y="connsiteY4"/>
+              </a:cxn>
+              <a:cxn ang="0">
+                <a:pos x="connsiteX5" y="connsiteY5"/>
+              </a:cxn>
+              <a:cxn ang="0">
+                <a:pos x="connsiteX6" y="connsiteY6"/>
+              </a:cxn>
+              <a:cxn ang="0">
+                <a:pos x="connsiteX7" y="connsiteY7"/>
+              </a:cxn>
+              <a:cxn ang="0">
+                <a:pos x="connsiteX8" y="connsiteY8"/>
+              </a:cxn>
+              <a:cxn ang="0">
+                <a:pos x="connsiteX9" y="connsiteY9"/>
+              </a:cxn>
+              <a:cxn ang="0">
+                <a:pos x="connsiteX10" y="connsiteY10"/>
+              </a:cxn>
+              <a:cxn ang="0">
+                <a:pos x="connsiteX11" y="connsiteY11"/>
+              </a:cxn>
+              <a:cxn ang="0">
+                <a:pos x="connsiteX12" y="connsiteY12"/>
+              </a:cxn>
+              <a:cxn ang="0">
+                <a:pos x="connsiteX13" y="connsiteY13"/>
+              </a:cxn>
+              <a:cxn ang="0">
+                <a:pos x="connsiteX14" y="connsiteY14"/>
+              </a:cxn>
+            </a:cxnLst>
+            <a:rect l="l" t="t" r="r" b="b"/>
+            <a:pathLst>
+              <a:path w="9113926" h="1177680">
+                <a:moveTo>
+                  <a:pt x="525894" y="0"/>
+                </a:moveTo>
+                <a:lnTo>
+                  <a:pt x="8588032" y="0"/>
+                </a:lnTo>
+                <a:cubicBezTo>
+                  <a:pt x="8878475" y="0"/>
+                  <a:pt x="9113925" y="235450"/>
+                  <a:pt x="9113925" y="525893"/>
+                </a:cubicBezTo>
+                <a:lnTo>
+                  <a:pt x="9113925" y="609084"/>
+                </a:lnTo>
+                <a:lnTo>
+                  <a:pt x="9113926" y="609084"/>
+                </a:lnTo>
+                <a:lnTo>
+                  <a:pt x="9113926" y="1177679"/>
+                </a:lnTo>
+                <a:lnTo>
+                  <a:pt x="8588042" y="1177679"/>
+                </a:lnTo>
+                <a:lnTo>
+                  <a:pt x="8588032" y="1177680"/>
+                </a:lnTo>
+                <a:lnTo>
+                  <a:pt x="525894" y="1177680"/>
+                </a:lnTo>
+                <a:lnTo>
+                  <a:pt x="525884" y="1177679"/>
+                </a:lnTo>
+                <a:lnTo>
+                  <a:pt x="0" y="1177679"/>
+                </a:lnTo>
+                <a:lnTo>
+                  <a:pt x="0" y="609084"/>
+                </a:lnTo>
+                <a:lnTo>
+                  <a:pt x="1" y="609084"/>
+                </a:lnTo>
+                <a:lnTo>
+                  <a:pt x="1" y="525893"/>
+                </a:lnTo>
+                <a:cubicBezTo>
+                  <a:pt x="1" y="235450"/>
+                  <a:pt x="235451" y="0"/>
+                  <a:pt x="525894" y="0"/>
+                </a:cubicBezTo>
+                <a:close/>
+              </a:path>
+            </a:pathLst>
+          </a:custGeom>
+          <a:gradFill>
+            <a:gsLst>
+              <a:gs pos="0">
+                <a:srgbClr val="F48120"/>
+              </a:gs>
+              <a:gs pos="100000">
+                <a:srgbClr val="FE6700"/>
+              </a:gs>
+            </a:gsLst>
+            <a:lin ang="5400000" scaled="1"/>
+          </a:gradFill>
+          <a:ln>
+            <a:solidFill>
+              <a:srgbClr val="FFE6AB"/>
+            </a:solidFill>
+          </a:ln>
+        </p:spPr>
+        <p:style>
+          <a:lnRef idx="2">
+            <a:schemeClr val="accent1">
+              <a:shade val="15000"/>
+            </a:schemeClr>
+          </a:lnRef>
+          <a:fillRef idx="1">
+            <a:schemeClr val="accent1"/>
+          </a:fillRef>
+          <a:effectRef idx="0">
+            <a:schemeClr val="accent1"/>
+          </a:effectRef>
+          <a:fontRef idx="minor">
+            <a:schemeClr val="lt1"/>
+          </a:fontRef>
+        </p:style>
+        <p:txBody>
+          <a:bodyPr wrap="square" rtlCol="0" anchor="ctr">
+            <a:noAutofit/>
+          </a:bodyPr>
+          <a:lstStyle/>
+          <a:p>
+            <a:pPr algn="ctr"/>
+            <a:endParaRPr lang="en-US" dirty="0"/>
+          </a:p>
+        </p:txBody>
+      </p:sp>
+      <p:sp>
+        <p:nvSpPr>
+          <p:cNvPr id="9" name="TextBox 8">
+            <a:extLst>
+              <a:ext uri="{FF2B5EF4-FFF2-40B4-BE49-F238E27FC236}">
+                <a16:creationId xmlns:a16="http://schemas.microsoft.com/office/drawing/2014/main" id="{743DB708-16AB-33EF-48F6-9A48114CA976}"/>
+              </a:ext>
+            </a:extLst>
+          </p:cNvPr>
+          <p:cNvSpPr txBox="1"/>
+          <p:nvPr/>
+        </p:nvSpPr>
+        <p:spPr>
+          <a:xfrm>
+            <a:off x="586539" y="928966"/>
+            <a:ext cx="9113922" cy="707886"/>
+          </a:xfrm>
+          <a:prstGeom prst="rect">
+            <a:avLst/>
+          </a:prstGeom>
+          <a:noFill/>
+        </p:spPr>
+        <p:txBody>
+          <a:bodyPr wrap="square" rtlCol="0">
+            <a:spAutoFit/>
+          </a:bodyPr>
+          <a:lstStyle/>
+          <a:p>
+            <a:pPr algn="ctr"/>
+            <a:r>
+              <a:rPr lang="en-US" sz="4000" dirty="0">
+                <a:solidFill>
+                  <a:schemeClr val="bg1"/>
+                </a:solidFill>
+                <a:latin typeface="SVN-Gilroy XBold" panose="00000900000000000000" pitchFamily="50" charset="0"/>
+              </a:rPr>
+              <a:t>VPB – Nền so sánh nửa cuối năm là điểm cần lưu ý</a:t>
+            </a:r>
+            <a:endParaRPr lang="vi-VN" sz="4000" dirty="0">
+              <a:solidFill>
+                <a:schemeClr val="bg1"/>
+              </a:solidFill>
+              <a:latin typeface="SVN-Gilroy XBold" panose="00000900000000000000" pitchFamily="50" charset="0"/>
+            </a:endParaRPr>
+          </a:p>
+        </p:txBody>
+      </p:sp>
+      <p:sp>
+        <p:nvSpPr>
+          <p:cNvPr id="2" name="TextBox 1">
+            <a:extLst>
+              <a:ext uri="{FF2B5EF4-FFF2-40B4-BE49-F238E27FC236}">
+                <a16:creationId xmlns:a16="http://schemas.microsoft.com/office/drawing/2014/main" id="{70BB23A5-EC1E-341E-EF08-A57BD2521AED}"/>
+              </a:ext>
+            </a:extLst>
+          </p:cNvPr>
+          <p:cNvSpPr txBox="1"/>
+          <p:nvPr/>
+        </p:nvSpPr>
+        <p:spPr>
+          <a:xfrm>
+            <a:off x="1429871" y="11654118"/>
+            <a:ext cx="7440705" cy="923330"/>
+          </a:xfrm>
+          <a:prstGeom prst="rect">
+            <a:avLst/>
+          </a:prstGeom>
+          <a:noFill/>
+        </p:spPr>
+        <p:txBody>
+          <a:bodyPr wrap="square" rtlCol="0">
+            <a:spAutoFit/>
+          </a:bodyPr>
+          <a:lstStyle/>
+          <a:p>
+            <a:r>
+              <a:rPr lang="en-US" dirty="0" err="1"/>
+              <a:t>Nguồn: VPBank, MAS tổng hợp. 1H25 và 2H25 suy ra từ LNTT cả năm 2025 (30,600 tỷ) và mức tăng 68% của 1H26. Cột 2H26 là mức cần đạt để hoàn thành kế hoạch 41,323 tỷ, không phải dự phóng của MAS.</a:t>
+            </a:r>
+            <a:r>
+              <a:rPr lang="en-US" dirty="0"/>
+              <a:t/>
+            </a:r>
+            <a:r>
+              <a:rPr lang="en-US" dirty="0" err="1"/>
+              <a:t/>
+            </a:r>
+            <a:r>
+              <a:rPr lang="en-US" dirty="0"/>
+              <a:t/>
+            </a:r>
+            <a:r>
+              <a:rPr lang="en-US" dirty="0" err="1"/>
+              <a:t/>
+            </a:r>
+            <a:r>
+              <a:rPr lang="en-US" dirty="0"/>
+              <a:t/>
+            </a:r>
+            <a:r>
+              <a:rPr lang="en-US" dirty="0" err="1"/>
+              <a:t/>
+            </a:r>
+            <a:r>
+              <a:rPr lang="en-US" dirty="0"/>
+              <a:t/>
+            </a:r>
+            <a:r>
+              <a:rPr lang="en-US" dirty="0" err="1"/>
+              <a:t/>
+            </a:r>
+            <a:r>
+              <a:rPr lang="en-US" dirty="0"/>
+              <a:t/>
+            </a:r>
+            <a:r>
+              <a:rPr lang="en-US" dirty="0" err="1"/>
+              <a:t/>
+            </a:r>
+            <a:r>
+              <a:rPr lang="en-US" dirty="0"/>
+              <a:t/>
+            </a:r>
+            <a:r>
+              <a:rPr lang="en-US" dirty="0" err="1"/>
+              <a:t/>
+            </a:r>
+            <a:r>
+              <a:rPr lang="en-US" dirty="0"/>
+              <a:t/>
+            </a:r>
+            <a:r>
+              <a:rPr lang="en-US" dirty="0" err="1"/>
+              <a:t/>
+            </a:r>
+            <a:r>
+              <a:rPr lang="en-US" dirty="0"/>
+              <a:t/>
+            </a:r>
+            <a:r>
+              <a:rPr lang="en-US" dirty="0" err="1"/>
+              <a:t/>
+            </a:r>
+            <a:r>
+              <a:rPr lang="en-US" dirty="0"/>
+              <a:t/>
+            </a:r>
+            <a:r>
+              <a:rPr lang="en-US" dirty="0" err="1"/>
+              <a:t/>
+            </a:r>
+            <a:r>
+              <a:rPr lang="en-US" dirty="0"/>
+              <a:t/>
+            </a:r>
+            <a:r>
+              <a:rPr lang="en-US" dirty="0" err="1"/>
+              <a:t/>
+            </a:r>
+            <a:r>
+              <a:rPr lang="en-US" dirty="0"/>
+              <a:t/>
+            </a:r>
+            <a:r>
+              <a:rPr lang="en-US" dirty="0" err="1"/>
+              <a:t/>
+            </a:r>
+            <a:r>
+              <a:rPr lang="en-US" dirty="0"/>
+              <a:t/>
+            </a:r>
+            <a:r>
+              <a:rPr lang="en-US" dirty="0" err="1"/>
+              <a:t/>
+            </a:r>
+            <a:r>
+              <a:rPr lang="en-US" dirty="0"/>
+              <a:t/>
+            </a:r>
+            <a:r>
+              <a:rPr lang="en-US" dirty="0" err="1"/>
+              <a:t/>
+            </a:r>
+            <a:r>
+              <a:rPr lang="en-US" dirty="0"/>
+              <a:t/>
+            </a:r>
+            <a:r>
+              <a:rPr lang="en-US" dirty="0" err="1"/>
+              <a:t/>
+            </a:r>
+            <a:r>
+              <a:rPr lang="en-US" dirty="0"/>
+              <a:t/>
+            </a:r>
+            <a:r>
+              <a:rPr lang="en-US" dirty="0" err="1"/>
+              <a:t/>
+            </a:r>
+            <a:r>
+              <a:rPr lang="en-US" dirty="0"/>
+              <a:t/>
+            </a:r>
+            <a:r>
+              <a:rPr lang="en-US" dirty="0" err="1"/>
+              <a:t/>
+            </a:r>
+            <a:r>
+              <a:rPr lang="en-US" dirty="0"/>
+              <a:t/>
+            </a:r>
+            <a:r>
+              <a:rPr lang="en-US" dirty="0" err="1"/>
+              <a:t/>
+            </a:r>
+            <a:r>
+              <a:rPr lang="en-US" dirty="0"/>
+              <a:t/>
+            </a:r>
+            <a:r>
+              <a:rPr lang="en-US" dirty="0" err="1"/>
+              <a:t/>
+            </a:r>
+            <a:r>
+              <a:rPr lang="en-US" dirty="0"/>
+              <a:t/>
+            </a:r>
+            <a:r>
+              <a:rPr lang="en-US" dirty="0" err="1"/>
+              <a:t/>
+            </a:r>
+            <a:r>
+              <a:rPr lang="en-US" dirty="0"/>
+              <a:t/>
+            </a:r>
+            <a:r>
+              <a:rPr lang="en-US" dirty="0" err="1"/>
+              <a:t/>
+            </a:r>
+            <a:r>
+              <a:rPr lang="en-US" dirty="0"/>
+              <a:t/>
+            </a:r>
+            <a:r>
+              <a:rPr lang="en-US" dirty="0" err="1"/>
+              <a:t/>
+            </a:r>
+            <a:r>
+              <a:rPr lang="en-US" dirty="0"/>
+              <a:t/>
+            </a:r>
+            <a:r>
+              <a:rPr lang="en-US" dirty="0" err="1"/>
+              <a:t/>
+            </a:r>
+            <a:r>
+              <a:rPr lang="en-US" dirty="0"/>
+              <a:t/>
+            </a:r>
+          </a:p>
+        </p:txBody>
+      </p:sp>
+      <p:graphicFrame>
+        <p:nvGraphicFramePr>
+          <p:cNvPr id="10" name="Chart 9"/>
+          <p:cNvGraphicFramePr>
+            <a:graphicFrameLocks noGrp="1"/>
+          </p:cNvGraphicFramePr>
+          <p:nvPr/>
+        </p:nvGraphicFramePr>
+        <p:xfrm>
+          <a:off x="1650999" y="2514600"/>
+          <a:ext cx="7543800" cy="9271000"/>
+        </p:xfrm>
+        <a:graphic>
+          <a:graphicData uri="http://schemas.openxmlformats.org/drawingml/2006/chart">
+            <c:chart xmlns:c="http://schemas.openxmlformats.org/drawingml/2006/chart" r:id="rId3"/>
+          </a:graphicData>
+        </a:graphic>
+      </p:graphicFrame>
+    </p:spTree>
+  </p:cSld>
+  <p:clrMapOvr>
+    <a:masterClrMapping/>
+  </p:clrMapOvr>
+</p:sld>
+</file>
+
 <file path=ppt/slides/slide5.xml><?xml version="1.0" encoding="utf-8"?>
 <p:sld xmlns:a="http://schemas.openxmlformats.org/drawingml/2006/main" xmlns:r="http://schemas.openxmlformats.org/officeDocument/2006/relationships" xmlns:p="http://schemas.openxmlformats.org/presentationml/2006/main">
   <p:cSld>

--- a/HotStock_VPB_31July2026.pptx
+++ b/HotStock_VPB_31July2026.pptx
@@ -12,6 +12,7 @@
     <p:sldId id="381" r:id="rId7"/>
     <p:sldId id="383" r:id="rId8"/>
     <p:sldId id="385" r:id="rId17"/>
+    <p:sldId id="386" r:id="rId18"/>
     <p:sldId id="378" r:id="rId10"/>
   </p:sldIdLst>
   <p:sldSz cx="10287000" cy="13716000"/>
@@ -229,7 +230,7 @@
           </c:tx>
           <c:spPr>
             <a:solidFill>
-              <a:srgbClr val="F0B26B"/>
+              <a:srgbClr val="C7811F"/>
             </a:solidFill>
             <a:ln>
               <a:noFill/>
@@ -243,7 +244,7 @@
             <c:bubble3D val="0"/>
             <c:spPr>
               <a:solidFill>
-                <a:srgbClr val="F0B26B"/>
+                <a:srgbClr val="C7811F"/>
               </a:solidFill>
               <a:ln>
                 <a:noFill/>
@@ -257,7 +258,7 @@
             <c:bubble3D val="0"/>
             <c:spPr>
               <a:solidFill>
-                <a:srgbClr val="F0B26B"/>
+                <a:srgbClr val="C7811F"/>
               </a:solidFill>
               <a:ln>
                 <a:noFill/>
@@ -271,7 +272,7 @@
             <c:bubble3D val="0"/>
             <c:spPr>
               <a:solidFill>
-                <a:srgbClr val="F0B26B"/>
+                <a:srgbClr val="C7811F"/>
               </a:solidFill>
               <a:ln>
                 <a:noFill/>
@@ -285,7 +286,7 @@
             <c:bubble3D val="0"/>
             <c:spPr>
               <a:solidFill>
-                <a:srgbClr val="F0B26B"/>
+                <a:srgbClr val="C7811F"/>
               </a:solidFill>
               <a:ln>
                 <a:noFill/>
@@ -299,7 +300,7 @@
             <c:bubble3D val="0"/>
             <c:spPr>
               <a:solidFill>
-                <a:srgbClr val="043B72"/>
+                <a:srgbClr val="0F5FA8"/>
               </a:solidFill>
               <a:ln>
                 <a:noFill/>
@@ -313,7 +314,7 @@
             <c:bubble3D val="0"/>
             <c:spPr>
               <a:solidFill>
-                <a:srgbClr val="043B72"/>
+                <a:srgbClr val="0F5FA8"/>
               </a:solidFill>
               <a:ln>
                 <a:noFill/>
@@ -388,22 +389,22 @@
                 <c:formatCode>#,##0</c:formatCode>
                 <c:ptCount val="6"/>
                 <c:pt idx="0">
-                  <c:v>5010</c:v>
+                  <c:v>5010.0</c:v>
                 </c:pt>
                 <c:pt idx="1">
-                  <c:v>6230</c:v>
+                  <c:v>6230.0</c:v>
                 </c:pt>
                 <c:pt idx="2">
-                  <c:v>9160</c:v>
+                  <c:v>9160.0</c:v>
                 </c:pt>
                 <c:pt idx="3">
-                  <c:v>10200</c:v>
+                  <c:v>10200.0</c:v>
                 </c:pt>
                 <c:pt idx="4">
-                  <c:v>7920</c:v>
+                  <c:v>7920.0</c:v>
                 </c:pt>
                 <c:pt idx="5">
-                  <c:v>10960</c:v>
+                  <c:v>10960.0</c:v>
                 </c:pt>
               </c:numCache>
             </c:numRef>
@@ -498,7 +499,7 @@
         <c:crossAx val="1317633407"/>
         <c:crosses val="autoZero"/>
         <c:crossBetween val="between"/>
-        <c:majorUnit val="3000"/>
+        <c:majorUnit val="3000.0"/>
       </c:valAx>
       <c:spPr>
         <a:noFill/>
@@ -561,7 +562,7 @@
             </a:pPr>
             <a:r>
               <a:rPr lang="vi-VN" sz="2000" dirty="0"/>
-              <a:t>(tỷ đồng)</a:t>
+              <a:t>(%)</a:t>
             </a:r>
           </a:p>
         </c:rich>
@@ -616,14 +617,14 @@
               <c:strCache>
                 <c:ptCount val="1"/>
                 <c:pt idx="0">
-                  <c:v>LNTT hợp nhất</c:v>
+                  <c:v>Nợ xấu nhóm 3–5 / tổng dư nợ</c:v>
                 </c:pt>
               </c:strCache>
             </c:strRef>
           </c:tx>
           <c:spPr>
             <a:solidFill>
-              <a:srgbClr val="F0B26B"/>
+              <a:srgbClr val="C7811F"/>
             </a:solidFill>
             <a:ln>
               <a:noFill/>
@@ -637,7 +638,7 @@
             <c:bubble3D val="0"/>
             <c:spPr>
               <a:solidFill>
-                <a:srgbClr val="F0B26B"/>
+                <a:srgbClr val="C7811F"/>
               </a:solidFill>
               <a:ln>
                 <a:noFill/>
@@ -651,7 +652,7 @@
             <c:bubble3D val="0"/>
             <c:spPr>
               <a:solidFill>
-                <a:srgbClr val="F0B26B"/>
+                <a:srgbClr val="C7811F"/>
               </a:solidFill>
               <a:ln>
                 <a:noFill/>
@@ -665,7 +666,7 @@
             <c:bubble3D val="0"/>
             <c:spPr>
               <a:solidFill>
-                <a:srgbClr val="043B72"/>
+                <a:srgbClr val="C7811F"/>
               </a:solidFill>
               <a:ln>
                 <a:noFill/>
@@ -679,7 +680,91 @@
             <c:bubble3D val="0"/>
             <c:spPr>
               <a:solidFill>
-                <a:srgbClr val="8DC8E8"/>
+                <a:srgbClr val="C7811F"/>
+              </a:solidFill>
+              <a:ln>
+                <a:noFill/>
+              </a:ln>
+              <a:effectLst/>
+            </c:spPr>
+          </c:dPt>
+          <c:dPt>
+            <c:idx val="4"/>
+            <c:invertIfNegative val="0"/>
+            <c:bubble3D val="0"/>
+            <c:spPr>
+              <a:solidFill>
+                <a:srgbClr val="0F5FA8"/>
+              </a:solidFill>
+              <a:ln>
+                <a:noFill/>
+              </a:ln>
+              <a:effectLst/>
+            </c:spPr>
+          </c:dPt>
+          <c:dPt>
+            <c:idx val="5"/>
+            <c:invertIfNegative val="0"/>
+            <c:bubble3D val="0"/>
+            <c:spPr>
+              <a:solidFill>
+                <a:srgbClr val="0F5FA8"/>
+              </a:solidFill>
+              <a:ln>
+                <a:noFill/>
+              </a:ln>
+              <a:effectLst/>
+            </c:spPr>
+          </c:dPt>
+          <c:dPt>
+            <c:idx val="6"/>
+            <c:invertIfNegative val="0"/>
+            <c:bubble3D val="0"/>
+            <c:spPr>
+              <a:solidFill>
+                <a:srgbClr val="0F5FA8"/>
+              </a:solidFill>
+              <a:ln>
+                <a:noFill/>
+              </a:ln>
+              <a:effectLst/>
+            </c:spPr>
+          </c:dPt>
+          <c:dPt>
+            <c:idx val="7"/>
+            <c:invertIfNegative val="0"/>
+            <c:bubble3D val="0"/>
+            <c:spPr>
+              <a:solidFill>
+                <a:srgbClr val="0F5FA8"/>
+              </a:solidFill>
+              <a:ln>
+                <a:noFill/>
+              </a:ln>
+              <a:effectLst/>
+            </c:spPr>
+          </c:dPt>
+          <c:dPt>
+            <c:idx val="8"/>
+            <c:invertIfNegative val="0"/>
+            <c:bubble3D val="0"/>
+            <c:spPr>
+              <a:solidFill>
+                <a:srgbClr val="0F5FA8"/>
+              </a:solidFill>
+              <a:ln>
+                <a:noFill/>
+              </a:ln>
+              <a:effectLst/>
+            </c:spPr>
+          </c:dPt>
+          <c:dPt>
+            <c:idx val="9"/>
+            <c:invertIfNegative val="0"/>
+            <c:bubble3D val="0"/>
+            <c:spPr>
+              <a:solidFill>
+                <a:srgbClr val="0F5FA8"/>
               </a:solidFill>
               <a:ln>
                 <a:noFill/>
@@ -688,7 +773,7 @@
             </c:spPr>
           </c:dPt>
           <c:dLbls>
-            <c:numFmt formatCode="#,##0" sourceLinked="0"/>
+            <c:numFmt formatCode="0.0&quot;%&quot;" sourceLinked="0"/>
             <c:spPr>
               <a:noFill/>
               <a:ln>
@@ -701,7 +786,7 @@
               <a:lstStyle/>
               <a:p>
                 <a:pPr>
-                  <a:defRPr sz="1600" b="1" i="0" u="none" strike="noStrike" kern="1200" baseline="0">
+                  <a:defRPr sz="1300" b="1" i="0" u="none" strike="noStrike" kern="1200" baseline="0">
                     <a:solidFill>
                       <a:srgbClr val="595959"/>
                     </a:solidFill>
@@ -723,47 +808,83 @@
           </c:dLbls>
           <c:cat>
             <c:strRef>
-              <c:f>Sheet1!$B$1:$E$1</c:f>
+              <c:f>Sheet1!$B$1:$K$1</c:f>
               <c:strCache>
-                <c:ptCount val="4"/>
+                <c:ptCount val="10"/>
                 <c:pt idx="0">
-                  <c:v>1H25</c:v>
+                  <c:v>Q1/24</c:v>
                 </c:pt>
                 <c:pt idx="1">
-                  <c:v>2H25</c:v>
+                  <c:v>Q2/24</c:v>
                 </c:pt>
                 <c:pt idx="2">
-                  <c:v>1H26</c:v>
+                  <c:v>Q3/24</c:v>
                 </c:pt>
                 <c:pt idx="3">
-                  <c:v>2H26 cần để đạt KH</c:v>
+                  <c:v>Q4/24</c:v>
+                </c:pt>
+                <c:pt idx="4">
+                  <c:v>Q1/25</c:v>
+                </c:pt>
+                <c:pt idx="5">
+                  <c:v>Q2/25</c:v>
+                </c:pt>
+                <c:pt idx="6">
+                  <c:v>Q3/25</c:v>
+                </c:pt>
+                <c:pt idx="7">
+                  <c:v>Q4/25</c:v>
+                </c:pt>
+                <c:pt idx="8">
+                  <c:v>Q1/26</c:v>
+                </c:pt>
+                <c:pt idx="9">
+                  <c:v>Q2/26</c:v>
                 </c:pt>
               </c:strCache>
             </c:strRef>
           </c:cat>
           <c:val>
             <c:numRef>
-              <c:f>Sheet1!$B$2:$E$2</c:f>
+              <c:f>Sheet1!$B$2:$K$2</c:f>
               <c:numCache>
-                <c:formatCode>#,##0</c:formatCode>
-                <c:ptCount val="4"/>
+                <c:formatCode>0.0"%"</c:formatCode>
+                <c:ptCount val="10"/>
                 <c:pt idx="0">
-                  <c:v>11240</c:v>
+                  <c:v>4.96</c:v>
                 </c:pt>
                 <c:pt idx="1">
-                  <c:v>19360</c:v>
+                  <c:v>5.21</c:v>
                 </c:pt>
                 <c:pt idx="2">
-                  <c:v>18880</c:v>
+                  <c:v>4.93</c:v>
                 </c:pt>
                 <c:pt idx="3">
-                  <c:v>22443</c:v>
+                  <c:v>4.3</c:v>
+                </c:pt>
+                <c:pt idx="4">
+                  <c:v>4.85</c:v>
+                </c:pt>
+                <c:pt idx="5">
+                  <c:v>4.06</c:v>
+                </c:pt>
+                <c:pt idx="6">
+                  <c:v>3.58</c:v>
+                </c:pt>
+                <c:pt idx="7">
+                  <c:v>3.4</c:v>
+                </c:pt>
+                <c:pt idx="8">
+                  <c:v>3.65</c:v>
+                </c:pt>
+                <c:pt idx="9">
+                  <c:v>3.34</c:v>
                 </c:pt>
               </c:numCache>
             </c:numRef>
           </c:val>
         </c:ser>
-        <c:gapWidth val="70"/>
+        <c:gapWidth val="55"/>
         <c:overlap val="-27"/>
         <c:axId val="811334001"/>
         <c:axId val="811334002"/>
@@ -794,7 +915,7 @@
           <a:lstStyle/>
           <a:p>
             <a:pPr>
-              <a:defRPr sz="1400" b="0" i="0" u="none" strike="noStrike" kern="1200" baseline="0">
+              <a:defRPr sz="1200" b="0" i="0" u="none" strike="noStrike" kern="1200" baseline="0">
                 <a:solidFill>
                   <a:srgbClr val="595959"/>
                 </a:solidFill>
@@ -821,7 +942,7 @@
         </c:scaling>
         <c:delete val="0"/>
         <c:axPos val="l"/>
-        <c:numFmt formatCode="#,##0" sourceLinked="0"/>
+        <c:numFmt formatCode="0.0&quot;%&quot;" sourceLinked="0"/>
         <c:majorTickMark val="none"/>
         <c:minorTickMark val="none"/>
         <c:tickLblPos val="nextTo"/>
@@ -852,7 +973,484 @@
         <c:crossAx val="811334001"/>
         <c:crosses val="autoZero"/>
         <c:crossBetween val="between"/>
-        <c:majorUnit val="5000"/>
+        <c:majorUnit val="1.0"/>
+      </c:valAx>
+      <c:spPr>
+        <a:noFill/>
+        <a:ln>
+          <a:noFill/>
+        </a:ln>
+        <a:effectLst/>
+      </c:spPr>
+    </c:plotArea>
+    <c:plotVisOnly val="1"/>
+    <c:dispBlanksAs val="gap"/>
+    <c:showDLblsOverMax val="0"/>
+  </c:chart>
+  <c:spPr>
+    <a:noFill/>
+    <a:ln w="9525" cap="flat" cmpd="sng" algn="ctr">
+      <a:noFill/>
+      <a:round/>
+    </a:ln>
+    <a:effectLst/>
+  </c:spPr>
+  <c:txPr>
+    <a:bodyPr/>
+    <a:lstStyle/>
+    <a:p>
+      <a:pPr>
+        <a:defRPr sz="2000">
+          <a:latin typeface="Noto Sans" panose="020B0502040504020204" pitchFamily="34" charset="0"/>
+          <a:ea typeface="Noto Sans" panose="020B0502040504020204" pitchFamily="34" charset="0"/>
+          <a:cs typeface="+mn-cs"/>
+        </a:defRPr>
+      </a:pPr>
+      <a:endParaRPr lang="en-US"/>
+    </a:p>
+  </c:txPr>
+  <c:externalData r:id="rId1">
+    <c:autoUpdate val="0"/>
+  </c:externalData>
+</c:chartSpace>
+</file>
+
+<file path=ppt/charts/chart6.xml><?xml version="1.0" encoding="utf-8"?>
+<c:chartSpace xmlns:c="http://schemas.openxmlformats.org/drawingml/2006/chart" xmlns:a="http://schemas.openxmlformats.org/drawingml/2006/main" xmlns:r="http://schemas.openxmlformats.org/officeDocument/2006/relationships">
+  <c:date1904 val="0"/>
+  <c:lang val="en-US"/>
+  <c:roundedCorners val="0"/>
+  <c:chart>
+    <c:title>
+      <c:tx>
+        <c:rich>
+          <a:bodyPr rot="0" spcFirstLastPara="1" vertOverflow="ellipsis" vert="horz" wrap="square" anchor="ctr" anchorCtr="1"/>
+          <a:lstStyle/>
+          <a:p>
+            <a:pPr>
+              <a:defRPr sz="2000" b="0" i="0" u="none" strike="noStrike" kern="1200" spc="0" baseline="0">
+                <a:solidFill>
+                  <a:srgbClr val="595959"/>
+                </a:solidFill>
+                <a:latin typeface="Noto Sans" panose="020B0502040504020204" pitchFamily="34" charset="0"/>
+                <a:ea typeface="Noto Sans" panose="020B0502040504020204" pitchFamily="34" charset="0"/>
+                <a:cs typeface="+mn-cs"/>
+              </a:defRPr>
+            </a:pPr>
+            <a:r>
+              <a:rPr lang="vi-VN" sz="2000" dirty="0"/>
+              <a:t>(%YoY)</a:t>
+            </a:r>
+          </a:p>
+        </c:rich>
+      </c:tx>
+      <c:layout>
+        <c:manualLayout>
+          <c:xMode val="edge"/>
+          <c:yMode val="edge"/>
+          <c:x val="4.5311773634288392E-2"/>
+          <c:y val="5.2450331681392921E-3"/>
+        </c:manualLayout>
+      </c:layout>
+      <c:overlay val="0"/>
+      <c:spPr>
+        <a:noFill/>
+        <a:ln>
+          <a:noFill/>
+        </a:ln>
+        <a:effectLst/>
+      </c:spPr>
+      <c:txPr>
+        <a:bodyPr rot="0" spcFirstLastPara="1" vertOverflow="ellipsis" vert="horz" wrap="square" anchor="ctr" anchorCtr="1"/>
+        <a:lstStyle/>
+        <a:p>
+          <a:pPr>
+            <a:defRPr sz="2000" b="0" i="0" u="none" strike="noStrike" kern="1200" baseline="0">
+              <a:solidFill>
+                <a:srgbClr val="595959"/>
+              </a:solidFill>
+              <a:latin typeface="Noto Sans" panose="020B0502040504020204" pitchFamily="34" charset="0"/>
+              <a:ea typeface="Noto Sans" panose="020B0502040504020204" pitchFamily="34" charset="0"/>
+              <a:cs typeface="+mn-cs"/>
+            </a:defRPr>
+          </a:pPr>
+          <a:endParaRPr lang="en-US"/>
+        </a:p>
+      </c:txPr>
+    </c:title>
+    <c:autoTitleDeleted val="0"/>
+    <c:plotArea>
+      <c:layout/>
+      <c:barChart>
+        <c:barDir val="col"/>
+        <c:grouping val="clustered"/>
+        <c:varyColors val="0"/>
+        <c:ser>
+          <c:idx val="0"/>
+          <c:order val="0"/>
+          <c:tx>
+            <c:strRef>
+              <c:f>Sheet1!$A$2</c:f>
+              <c:strCache>
+                <c:ptCount val="1"/>
+                <c:pt idx="0">
+                  <c:v>Tăng trưởng cho vay khách hàng</c:v>
+                </c:pt>
+              </c:strCache>
+            </c:strRef>
+          </c:tx>
+          <c:spPr>
+            <a:solidFill>
+              <a:srgbClr val="C7811F"/>
+            </a:solidFill>
+            <a:ln>
+              <a:noFill/>
+            </a:ln>
+            <a:effectLst/>
+          </c:spPr>
+          <c:invertIfNegative val="0"/>
+          <c:dPt>
+            <c:idx val="0"/>
+            <c:invertIfNegative val="0"/>
+            <c:bubble3D val="0"/>
+            <c:spPr>
+              <a:solidFill>
+                <a:srgbClr val="C7811F"/>
+              </a:solidFill>
+              <a:ln>
+                <a:noFill/>
+              </a:ln>
+              <a:effectLst/>
+            </c:spPr>
+          </c:dPt>
+          <c:dPt>
+            <c:idx val="1"/>
+            <c:invertIfNegative val="0"/>
+            <c:bubble3D val="0"/>
+            <c:spPr>
+              <a:solidFill>
+                <a:srgbClr val="C7811F"/>
+              </a:solidFill>
+              <a:ln>
+                <a:noFill/>
+              </a:ln>
+              <a:effectLst/>
+            </c:spPr>
+          </c:dPt>
+          <c:dPt>
+            <c:idx val="2"/>
+            <c:invertIfNegative val="0"/>
+            <c:bubble3D val="0"/>
+            <c:spPr>
+              <a:solidFill>
+                <a:srgbClr val="C7811F"/>
+              </a:solidFill>
+              <a:ln>
+                <a:noFill/>
+              </a:ln>
+              <a:effectLst/>
+            </c:spPr>
+          </c:dPt>
+          <c:dPt>
+            <c:idx val="3"/>
+            <c:invertIfNegative val="0"/>
+            <c:bubble3D val="0"/>
+            <c:spPr>
+              <a:solidFill>
+                <a:srgbClr val="C7811F"/>
+              </a:solidFill>
+              <a:ln>
+                <a:noFill/>
+              </a:ln>
+              <a:effectLst/>
+            </c:spPr>
+          </c:dPt>
+          <c:dPt>
+            <c:idx val="4"/>
+            <c:invertIfNegative val="0"/>
+            <c:bubble3D val="0"/>
+            <c:spPr>
+              <a:solidFill>
+                <a:srgbClr val="0F5FA8"/>
+              </a:solidFill>
+              <a:ln>
+                <a:noFill/>
+              </a:ln>
+              <a:effectLst/>
+            </c:spPr>
+          </c:dPt>
+          <c:dPt>
+            <c:idx val="5"/>
+            <c:invertIfNegative val="0"/>
+            <c:bubble3D val="0"/>
+            <c:spPr>
+              <a:solidFill>
+                <a:srgbClr val="0F5FA8"/>
+              </a:solidFill>
+              <a:ln>
+                <a:noFill/>
+              </a:ln>
+              <a:effectLst/>
+            </c:spPr>
+          </c:dPt>
+          <c:dPt>
+            <c:idx val="6"/>
+            <c:invertIfNegative val="0"/>
+            <c:bubble3D val="0"/>
+            <c:spPr>
+              <a:solidFill>
+                <a:srgbClr val="0F5FA8"/>
+              </a:solidFill>
+              <a:ln>
+                <a:noFill/>
+              </a:ln>
+              <a:effectLst/>
+            </c:spPr>
+          </c:dPt>
+          <c:dPt>
+            <c:idx val="7"/>
+            <c:invertIfNegative val="0"/>
+            <c:bubble3D val="0"/>
+            <c:spPr>
+              <a:solidFill>
+                <a:srgbClr val="0F5FA8"/>
+              </a:solidFill>
+              <a:ln>
+                <a:noFill/>
+              </a:ln>
+              <a:effectLst/>
+            </c:spPr>
+          </c:dPt>
+          <c:dPt>
+            <c:idx val="8"/>
+            <c:invertIfNegative val="0"/>
+            <c:bubble3D val="0"/>
+            <c:spPr>
+              <a:solidFill>
+                <a:srgbClr val="0F5FA8"/>
+              </a:solidFill>
+              <a:ln>
+                <a:noFill/>
+              </a:ln>
+              <a:effectLst/>
+            </c:spPr>
+          </c:dPt>
+          <c:dPt>
+            <c:idx val="9"/>
+            <c:invertIfNegative val="0"/>
+            <c:bubble3D val="0"/>
+            <c:spPr>
+              <a:solidFill>
+                <a:srgbClr val="0F5FA8"/>
+              </a:solidFill>
+              <a:ln>
+                <a:noFill/>
+              </a:ln>
+              <a:effectLst/>
+            </c:spPr>
+          </c:dPt>
+          <c:dLbls>
+            <c:numFmt formatCode="0.0&quot;%&quot;" sourceLinked="0"/>
+            <c:spPr>
+              <a:noFill/>
+              <a:ln>
+                <a:noFill/>
+              </a:ln>
+              <a:effectLst/>
+            </c:spPr>
+            <c:txPr>
+              <a:bodyPr rot="0" spcFirstLastPara="1" vertOverflow="ellipsis" vert="horz" wrap="square" anchor="ctr" anchorCtr="1"/>
+              <a:lstStyle/>
+              <a:p>
+                <a:pPr>
+                  <a:defRPr sz="1300" b="1" i="0" u="none" strike="noStrike" kern="1200" baseline="0">
+                    <a:solidFill>
+                      <a:srgbClr val="595959"/>
+                    </a:solidFill>
+                    <a:latin typeface="Noto Sans" panose="020B0502040504020204" pitchFamily="34" charset="0"/>
+                    <a:ea typeface="Noto Sans" panose="020B0502040504020204" pitchFamily="34" charset="0"/>
+                    <a:cs typeface="+mn-cs"/>
+                  </a:defRPr>
+                </a:pPr>
+                <a:endParaRPr lang="en-US"/>
+              </a:p>
+            </c:txPr>
+            <c:dLblPos val="outEnd"/>
+            <c:showLegendKey val="0"/>
+            <c:showVal val="1"/>
+            <c:showCatName val="0"/>
+            <c:showSerName val="0"/>
+            <c:showPercent val="0"/>
+            <c:showBubbleSize val="0"/>
+          </c:dLbls>
+          <c:cat>
+            <c:strRef>
+              <c:f>Sheet1!$B$1:$K$1</c:f>
+              <c:strCache>
+                <c:ptCount val="10"/>
+                <c:pt idx="0">
+                  <c:v>Q1/24</c:v>
+                </c:pt>
+                <c:pt idx="1">
+                  <c:v>Q2/24</c:v>
+                </c:pt>
+                <c:pt idx="2">
+                  <c:v>Q3/24</c:v>
+                </c:pt>
+                <c:pt idx="3">
+                  <c:v>Q4/24</c:v>
+                </c:pt>
+                <c:pt idx="4">
+                  <c:v>Q1/25</c:v>
+                </c:pt>
+                <c:pt idx="5">
+                  <c:v>Q2/25</c:v>
+                </c:pt>
+                <c:pt idx="6">
+                  <c:v>Q3/25</c:v>
+                </c:pt>
+                <c:pt idx="7">
+                  <c:v>Q4/25</c:v>
+                </c:pt>
+                <c:pt idx="8">
+                  <c:v>Q1/26</c:v>
+                </c:pt>
+                <c:pt idx="9">
+                  <c:v>Q2/26</c:v>
+                </c:pt>
+              </c:strCache>
+            </c:strRef>
+          </c:cat>
+          <c:val>
+            <c:numRef>
+              <c:f>Sheet1!$B$2:$K$2</c:f>
+              <c:numCache>
+                <c:formatCode>0.0"%"</c:formatCode>
+                <c:ptCount val="10"/>
+                <c:pt idx="0">
+                  <c:v>26.1</c:v>
+                </c:pt>
+                <c:pt idx="1">
+                  <c:v>28.23</c:v>
+                </c:pt>
+                <c:pt idx="2">
+                  <c:v>21.83</c:v>
+                </c:pt>
+                <c:pt idx="3">
+                  <c:v>23.53</c:v>
+                </c:pt>
+                <c:pt idx="4">
+                  <c:v>25.71</c:v>
+                </c:pt>
+                <c:pt idx="5">
+                  <c:v>33.32</c:v>
+                </c:pt>
+                <c:pt idx="6">
+                  <c:v>41.82</c:v>
+                </c:pt>
+                <c:pt idx="7">
+                  <c:v>35.97</c:v>
+                </c:pt>
+                <c:pt idx="8">
+                  <c:v>43.12</c:v>
+                </c:pt>
+                <c:pt idx="9">
+                  <c:v>40.41</c:v>
+                </c:pt>
+              </c:numCache>
+            </c:numRef>
+          </c:val>
+        </c:ser>
+        <c:gapWidth val="55"/>
+        <c:overlap val="-27"/>
+        <c:axId val="811334003"/>
+        <c:axId val="811334004"/>
+      </c:barChart>
+      <c:catAx>
+        <c:axId val="811334003"/>
+        <c:scaling>
+          <c:orientation val="minMax"/>
+        </c:scaling>
+        <c:delete val="0"/>
+        <c:axPos val="b"/>
+        <c:numFmt formatCode="General" sourceLinked="1"/>
+        <c:majorTickMark val="none"/>
+        <c:minorTickMark val="none"/>
+        <c:tickLblPos val="low"/>
+        <c:spPr>
+          <a:noFill/>
+          <a:ln w="9525" cap="flat" cmpd="sng" algn="ctr">
+            <a:solidFill>
+              <a:srgbClr val="D9D9D9"/>
+            </a:solidFill>
+            <a:round/>
+          </a:ln>
+          <a:effectLst/>
+        </c:spPr>
+        <c:txPr>
+          <a:bodyPr rot="-60000000" spcFirstLastPara="1" vertOverflow="ellipsis" vert="horz" wrap="square" anchor="ctr" anchorCtr="1"/>
+          <a:lstStyle/>
+          <a:p>
+            <a:pPr>
+              <a:defRPr sz="1200" b="0" i="0" u="none" strike="noStrike" kern="1200" baseline="0">
+                <a:solidFill>
+                  <a:srgbClr val="595959"/>
+                </a:solidFill>
+                <a:latin typeface="Noto Sans" panose="020B0502040504020204" pitchFamily="34" charset="0"/>
+                <a:ea typeface="Noto Sans" panose="020B0502040504020204" pitchFamily="34" charset="0"/>
+                <a:cs typeface="+mn-cs"/>
+              </a:defRPr>
+            </a:pPr>
+            <a:endParaRPr lang="en-US"/>
+          </a:p>
+        </c:txPr>
+        <c:crossAx val="811334004"/>
+        <c:crosses val="autoZero"/>
+        <c:auto val="1"/>
+        <c:lblAlgn val="ctr"/>
+        <c:lblOffset val="100"/>
+        <c:noMultiLvlLbl val="0"/>
+      </c:catAx>
+      <c:valAx>
+        <c:axId val="811334004"/>
+        <c:scaling>
+          <c:orientation val="minMax"/>
+          <c:min val="0"/>
+        </c:scaling>
+        <c:delete val="0"/>
+        <c:axPos val="l"/>
+        <c:numFmt formatCode="0.0&quot;%&quot;" sourceLinked="0"/>
+        <c:majorTickMark val="none"/>
+        <c:minorTickMark val="none"/>
+        <c:tickLblPos val="nextTo"/>
+        <c:spPr>
+          <a:noFill/>
+          <a:ln>
+            <a:noFill/>
+          </a:ln>
+          <a:effectLst/>
+        </c:spPr>
+        <c:txPr>
+          <a:bodyPr rot="-60000000" spcFirstLastPara="1" vertOverflow="ellipsis" vert="horz" wrap="square" anchor="ctr" anchorCtr="1"/>
+          <a:lstStyle/>
+          <a:p>
+            <a:pPr>
+              <a:defRPr sz="2000" b="0" i="0" u="none" strike="noStrike" kern="1200" baseline="0">
+                <a:solidFill>
+                  <a:srgbClr val="595959"/>
+                </a:solidFill>
+                <a:latin typeface="Noto Sans" panose="020B0502040504020204" pitchFamily="34" charset="0"/>
+                <a:ea typeface="Noto Sans" panose="020B0502040504020204" pitchFamily="34" charset="0"/>
+                <a:cs typeface="+mn-cs"/>
+              </a:defRPr>
+            </a:pPr>
+            <a:endParaRPr lang="en-US"/>
+          </a:p>
+        </c:txPr>
+        <c:crossAx val="811334003"/>
+        <c:crosses val="autoZero"/>
+        <c:crossBetween val="between"/>
+        <c:majorUnit val="10.0"/>
       </c:valAx>
       <c:spPr>
         <a:noFill/>
@@ -2292,7 +2890,7 @@
             <a:rPr lang="en-US" sz="2900" dirty="0">
               <a:latin typeface="SVN-Gilroy" panose="00000500000000000000" pitchFamily="50" charset="0"/>
             </a:rPr>
-            <a:t>- Tín dụng ngân hàng mẹ ~1.06 triệu tỷ (+24.6%); nợ xấu ngân hàng mẹ (TT31) ~2%, hợp nhất dưới 3%</a:t>
+            <a:t>- Cho vay khách hàng +40.4% CK; nợ xấu hợp nhất (nhóm 3-5) còn 3.34%, thấp nhất kể từ 2020; chi phí tín dụng còn 2.24% dư nợ (FiinProX)</a:t>
           </a:r>
           <a:endParaRPr lang="en-US" sz="2900" b="1" dirty="0">
             <a:latin typeface="SVN-Gilroy" panose="00000500000000000000" pitchFamily="50" charset="0"/>
@@ -2884,7 +3482,7 @@
               </a:solidFill>
               <a:latin typeface="SVN-Gilroy" panose="00000500000000000000"/>
             </a:rPr>
-            <a:t>- Pha loãng ~21% từ cổ tức cổ phiếu; thời điểm phát hành riêng lẻ chưa chắc chắn</a:t>
+            <a:t>- NIM mỏng dần (5.17%), CASA giảm còn 11.5%, bao phủ nợ xấu mới 56%; pha loãng ~21% từ cổ tức cổ phiếu</a:t>
           </a:r>
           <a:r>
             <a:rPr lang="vi-VN" sz="2900" b="0" dirty="0">
@@ -3470,7 +4068,7 @@
             <a:rPr lang="en-US" sz="2900" kern="1200" dirty="0">
               <a:latin typeface="SVN-Gilroy" panose="00000500000000000000" pitchFamily="50" charset="0"/>
             </a:rPr>
-            <a:t>- Tín dụng ngân hàng mẹ ~1.06 triệu tỷ (+24.6%); nợ xấu ngân hàng mẹ (TT31) ~2%, hợp nhất dưới 3%</a:t>
+            <a:t>- Cho vay khách hàng +40.4% CK; nợ xấu hợp nhất (nhóm 3-5) còn 3.34%, thấp nhất kể từ 2020; chi phí tín dụng còn 2.24% dư nợ (FiinProX)</a:t>
           </a:r>
           <a:endParaRPr lang="en-US" sz="2900" b="1" kern="1200" dirty="0">
             <a:latin typeface="SVN-Gilroy" panose="00000500000000000000" pitchFamily="50" charset="0"/>
@@ -4426,7 +5024,7 @@
               </a:solidFill>
               <a:latin typeface="SVN-Gilroy" panose="00000500000000000000"/>
             </a:rPr>
-            <a:t>- Pha loãng ~21% từ cổ tức cổ phiếu; thời điểm phát hành riêng lẻ chưa chắc chắn</a:t>
+            <a:t>- NIM mỏng dần (5.17%), CASA giảm còn 11.5%, bao phủ nợ xấu mới 56%; pha loãng ~21% từ cổ tức cổ phiếu</a:t>
           </a:r>
           <a:r>
             <a:rPr lang="vi-VN" sz="2900" b="0" kern="1200" dirty="0">
@@ -9680,7 +10278,7 @@
                 </a:solidFill>
                 <a:latin typeface="SVN-Gilroy XBold" panose="00000900000000000000" pitchFamily="50" charset="0"/>
               </a:rPr>
-              <a:t>VPB – Nền so sánh nửa cuối năm là điểm cần lưu ý</a:t>
+              <a:t>VPB – Nợ xấu hợp nhất theo quý</a:t>
             </a:r>
             <a:endParaRPr lang="vi-VN" sz="4000" dirty="0">
               <a:solidFill>
@@ -9721,7 +10319,7 @@
           <a:p>
             <a:r>
               <a:rPr lang="en-US" dirty="0" err="1"/>
-              <a:t>Nguồn: VPBank, MAS tổng hợp. 1H25 và 2H25 suy ra từ LNTT cả năm 2025 (30,600 tỷ) và mức tăng 68% của 1H26. Cột 2H26 là mức cần đạt để hoàn thành kế hoạch 41,323 tỷ, không phải dự phóng của MAS.</a:t>
+              <a:t>Nợ xấu nhóm 3–5 trên tổng dư nợ. Từ đỉnh 6.7% quý 2/2023, tỷ lệ này đã giảm một nửa và hiện là mức thấp nhất kể từ 2020. Nguồn: FiinProX (30/07/2026).</a:t>
             </a:r>
             <a:r>
               <a:rPr lang="en-US" dirty="0"/>
@@ -9915,8 +10513,541 @@
           <p:nvPr/>
         </p:nvGraphicFramePr>
         <p:xfrm>
-          <a:off x="1650999" y="2514600"/>
-          <a:ext cx="7543800" cy="9271000"/>
+          <a:off x="1200000" y="2514600"/>
+          <a:ext cx="8000000" cy="9271000"/>
+        </p:xfrm>
+        <a:graphic>
+          <a:graphicData uri="http://schemas.openxmlformats.org/drawingml/2006/chart">
+            <c:chart xmlns:c="http://schemas.openxmlformats.org/drawingml/2006/chart" r:id="rId3"/>
+          </a:graphicData>
+        </a:graphic>
+      </p:graphicFrame>
+    </p:spTree>
+  </p:cSld>
+  <p:clrMapOvr>
+    <a:masterClrMapping/>
+  </p:clrMapOvr>
+</p:sld>
+</file>
+
+<file path=ppt/slides/slide11.xml><?xml version="1.0" encoding="utf-8"?>
+<p:sld xmlns:a="http://schemas.openxmlformats.org/drawingml/2006/main" xmlns:p="http://schemas.openxmlformats.org/presentationml/2006/main" xmlns:r="http://schemas.openxmlformats.org/officeDocument/2006/relationships">
+  <p:cSld>
+    <p:spTree>
+      <p:nvGrpSpPr>
+        <p:cNvPr id="1" name=""/>
+        <p:cNvGrpSpPr/>
+        <p:nvPr/>
+      </p:nvGrpSpPr>
+      <p:grpSpPr/>
+      <p:pic>
+        <p:nvPicPr>
+          <p:cNvPr id="6" name="Picture 5" descr="A white rectangle with pink border&#10;&#10;Description automatically generated">
+            <a:extLst>
+              <a:ext uri="{FF2B5EF4-FFF2-40B4-BE49-F238E27FC236}">
+                <a16:creationId xmlns:a16="http://schemas.microsoft.com/office/drawing/2014/main" id="{E28BF981-17E9-B1F5-F8D5-3BFE81077E0E}"/>
+              </a:ext>
+            </a:extLst>
+          </p:cNvPr>
+          <p:cNvPicPr>
+            <a:picLocks noGrp="1" noRot="1" noChangeAspect="1" noMove="1" noResize="1" noEditPoints="1" noAdjustHandles="1" noChangeArrowheads="1" noChangeShapeType="1" noCrop="1"/>
+          </p:cNvPicPr>
+          <p:nvPr/>
+        </p:nvPicPr>
+        <p:blipFill>
+          <a:blip r:embed="rId2">
+            <a:extLst>
+              <a:ext uri="{28A0092B-C50C-407E-A947-70E740481C1C}">
+                <a14:useLocalDpi xmlns:a14="http://schemas.microsoft.com/office/drawing/2010/main" val="0"/>
+              </a:ext>
+            </a:extLst>
+          </a:blip>
+          <a:stretch>
+            <a:fillRect/>
+          </a:stretch>
+        </p:blipFill>
+        <p:spPr>
+          <a:xfrm>
+            <a:off x="0" y="0"/>
+            <a:ext cx="10287000" cy="13716000"/>
+          </a:xfrm>
+          <a:prstGeom prst="rect">
+            <a:avLst/>
+          </a:prstGeom>
+        </p:spPr>
+      </p:pic>
+      <p:sp>
+        <p:nvSpPr>
+          <p:cNvPr id="4" name="Freeform: Shape 3">
+            <a:extLst>
+              <a:ext uri="{FF2B5EF4-FFF2-40B4-BE49-F238E27FC236}">
+                <a16:creationId xmlns:a16="http://schemas.microsoft.com/office/drawing/2014/main" id="{55EAFF75-477A-37F1-48F6-130C019EA774}"/>
+              </a:ext>
+            </a:extLst>
+          </p:cNvPr>
+          <p:cNvSpPr/>
+          <p:nvPr/>
+        </p:nvSpPr>
+        <p:spPr>
+          <a:xfrm>
+            <a:off x="586534" y="668818"/>
+            <a:ext cx="9113926" cy="1177680"/>
+          </a:xfrm>
+          <a:custGeom>
+            <a:avLst/>
+            <a:gdLst>
+              <a:gd name="connsiteX0" fmla="*/ 525894 w 9113926"/>
+              <a:gd name="connsiteY0" fmla="*/ 0 h 1177680"/>
+              <a:gd name="connsiteX1" fmla="*/ 8588032 w 9113926"/>
+              <a:gd name="connsiteY1" fmla="*/ 0 h 1177680"/>
+              <a:gd name="connsiteX2" fmla="*/ 9113925 w 9113926"/>
+              <a:gd name="connsiteY2" fmla="*/ 525893 h 1177680"/>
+              <a:gd name="connsiteX3" fmla="*/ 9113925 w 9113926"/>
+              <a:gd name="connsiteY3" fmla="*/ 609084 h 1177680"/>
+              <a:gd name="connsiteX4" fmla="*/ 9113926 w 9113926"/>
+              <a:gd name="connsiteY4" fmla="*/ 609084 h 1177680"/>
+              <a:gd name="connsiteX5" fmla="*/ 9113926 w 9113926"/>
+              <a:gd name="connsiteY5" fmla="*/ 1177679 h 1177680"/>
+              <a:gd name="connsiteX6" fmla="*/ 8588042 w 9113926"/>
+              <a:gd name="connsiteY6" fmla="*/ 1177679 h 1177680"/>
+              <a:gd name="connsiteX7" fmla="*/ 8588032 w 9113926"/>
+              <a:gd name="connsiteY7" fmla="*/ 1177680 h 1177680"/>
+              <a:gd name="connsiteX8" fmla="*/ 525894 w 9113926"/>
+              <a:gd name="connsiteY8" fmla="*/ 1177680 h 1177680"/>
+              <a:gd name="connsiteX9" fmla="*/ 525884 w 9113926"/>
+              <a:gd name="connsiteY9" fmla="*/ 1177679 h 1177680"/>
+              <a:gd name="connsiteX10" fmla="*/ 0 w 9113926"/>
+              <a:gd name="connsiteY10" fmla="*/ 1177679 h 1177680"/>
+              <a:gd name="connsiteX11" fmla="*/ 0 w 9113926"/>
+              <a:gd name="connsiteY11" fmla="*/ 609084 h 1177680"/>
+              <a:gd name="connsiteX12" fmla="*/ 1 w 9113926"/>
+              <a:gd name="connsiteY12" fmla="*/ 609084 h 1177680"/>
+              <a:gd name="connsiteX13" fmla="*/ 1 w 9113926"/>
+              <a:gd name="connsiteY13" fmla="*/ 525893 h 1177680"/>
+              <a:gd name="connsiteX14" fmla="*/ 525894 w 9113926"/>
+              <a:gd name="connsiteY14" fmla="*/ 0 h 1177680"/>
+            </a:gdLst>
+            <a:ahLst/>
+            <a:cxnLst>
+              <a:cxn ang="0">
+                <a:pos x="connsiteX0" y="connsiteY0"/>
+              </a:cxn>
+              <a:cxn ang="0">
+                <a:pos x="connsiteX1" y="connsiteY1"/>
+              </a:cxn>
+              <a:cxn ang="0">
+                <a:pos x="connsiteX2" y="connsiteY2"/>
+              </a:cxn>
+              <a:cxn ang="0">
+                <a:pos x="connsiteX3" y="connsiteY3"/>
+              </a:cxn>
+              <a:cxn ang="0">
+                <a:pos x="connsiteX4" y="connsiteY4"/>
+              </a:cxn>
+              <a:cxn ang="0">
+                <a:pos x="connsiteX5" y="connsiteY5"/>
+              </a:cxn>
+              <a:cxn ang="0">
+                <a:pos x="connsiteX6" y="connsiteY6"/>
+              </a:cxn>
+              <a:cxn ang="0">
+                <a:pos x="connsiteX7" y="connsiteY7"/>
+              </a:cxn>
+              <a:cxn ang="0">
+                <a:pos x="connsiteX8" y="connsiteY8"/>
+              </a:cxn>
+              <a:cxn ang="0">
+                <a:pos x="connsiteX9" y="connsiteY9"/>
+              </a:cxn>
+              <a:cxn ang="0">
+                <a:pos x="connsiteX10" y="connsiteY10"/>
+              </a:cxn>
+              <a:cxn ang="0">
+                <a:pos x="connsiteX11" y="connsiteY11"/>
+              </a:cxn>
+              <a:cxn ang="0">
+                <a:pos x="connsiteX12" y="connsiteY12"/>
+              </a:cxn>
+              <a:cxn ang="0">
+                <a:pos x="connsiteX13" y="connsiteY13"/>
+              </a:cxn>
+              <a:cxn ang="0">
+                <a:pos x="connsiteX14" y="connsiteY14"/>
+              </a:cxn>
+            </a:cxnLst>
+            <a:rect l="l" t="t" r="r" b="b"/>
+            <a:pathLst>
+              <a:path w="9113926" h="1177680">
+                <a:moveTo>
+                  <a:pt x="525894" y="0"/>
+                </a:moveTo>
+                <a:lnTo>
+                  <a:pt x="8588032" y="0"/>
+                </a:lnTo>
+                <a:cubicBezTo>
+                  <a:pt x="8878475" y="0"/>
+                  <a:pt x="9113925" y="235450"/>
+                  <a:pt x="9113925" y="525893"/>
+                </a:cubicBezTo>
+                <a:lnTo>
+                  <a:pt x="9113925" y="609084"/>
+                </a:lnTo>
+                <a:lnTo>
+                  <a:pt x="9113926" y="609084"/>
+                </a:lnTo>
+                <a:lnTo>
+                  <a:pt x="9113926" y="1177679"/>
+                </a:lnTo>
+                <a:lnTo>
+                  <a:pt x="8588042" y="1177679"/>
+                </a:lnTo>
+                <a:lnTo>
+                  <a:pt x="8588032" y="1177680"/>
+                </a:lnTo>
+                <a:lnTo>
+                  <a:pt x="525894" y="1177680"/>
+                </a:lnTo>
+                <a:lnTo>
+                  <a:pt x="525884" y="1177679"/>
+                </a:lnTo>
+                <a:lnTo>
+                  <a:pt x="0" y="1177679"/>
+                </a:lnTo>
+                <a:lnTo>
+                  <a:pt x="0" y="609084"/>
+                </a:lnTo>
+                <a:lnTo>
+                  <a:pt x="1" y="609084"/>
+                </a:lnTo>
+                <a:lnTo>
+                  <a:pt x="1" y="525893"/>
+                </a:lnTo>
+                <a:cubicBezTo>
+                  <a:pt x="1" y="235450"/>
+                  <a:pt x="235451" y="0"/>
+                  <a:pt x="525894" y="0"/>
+                </a:cubicBezTo>
+                <a:close/>
+              </a:path>
+            </a:pathLst>
+          </a:custGeom>
+          <a:gradFill>
+            <a:gsLst>
+              <a:gs pos="0">
+                <a:srgbClr val="F48120"/>
+              </a:gs>
+              <a:gs pos="100000">
+                <a:srgbClr val="FE6700"/>
+              </a:gs>
+            </a:gsLst>
+            <a:lin ang="5400000" scaled="1"/>
+          </a:gradFill>
+          <a:ln>
+            <a:solidFill>
+              <a:srgbClr val="FFE6AB"/>
+            </a:solidFill>
+          </a:ln>
+        </p:spPr>
+        <p:style>
+          <a:lnRef idx="2">
+            <a:schemeClr val="accent1">
+              <a:shade val="15000"/>
+            </a:schemeClr>
+          </a:lnRef>
+          <a:fillRef idx="1">
+            <a:schemeClr val="accent1"/>
+          </a:fillRef>
+          <a:effectRef idx="0">
+            <a:schemeClr val="accent1"/>
+          </a:effectRef>
+          <a:fontRef idx="minor">
+            <a:schemeClr val="lt1"/>
+          </a:fontRef>
+        </p:style>
+        <p:txBody>
+          <a:bodyPr wrap="square" rtlCol="0" anchor="ctr">
+            <a:noAutofit/>
+          </a:bodyPr>
+          <a:lstStyle/>
+          <a:p>
+            <a:pPr algn="ctr"/>
+            <a:endParaRPr lang="en-US" dirty="0"/>
+          </a:p>
+        </p:txBody>
+      </p:sp>
+      <p:sp>
+        <p:nvSpPr>
+          <p:cNvPr id="9" name="TextBox 8">
+            <a:extLst>
+              <a:ext uri="{FF2B5EF4-FFF2-40B4-BE49-F238E27FC236}">
+                <a16:creationId xmlns:a16="http://schemas.microsoft.com/office/drawing/2014/main" id="{743DB708-16AB-33EF-48F6-9A48114CA976}"/>
+              </a:ext>
+            </a:extLst>
+          </p:cNvPr>
+          <p:cNvSpPr txBox="1"/>
+          <p:nvPr/>
+        </p:nvSpPr>
+        <p:spPr>
+          <a:xfrm>
+            <a:off x="586539" y="928966"/>
+            <a:ext cx="9113922" cy="707886"/>
+          </a:xfrm>
+          <a:prstGeom prst="rect">
+            <a:avLst/>
+          </a:prstGeom>
+          <a:noFill/>
+        </p:spPr>
+        <p:txBody>
+          <a:bodyPr wrap="square" rtlCol="0">
+            <a:spAutoFit/>
+          </a:bodyPr>
+          <a:lstStyle/>
+          <a:p>
+            <a:pPr algn="ctr"/>
+            <a:r>
+              <a:rPr lang="en-US" sz="4000" dirty="0">
+                <a:solidFill>
+                  <a:schemeClr val="bg1"/>
+                </a:solidFill>
+                <a:latin typeface="SVN-Gilroy XBold" panose="00000900000000000000" pitchFamily="50" charset="0"/>
+              </a:rPr>
+              <a:t>VPB – Tăng trưởng cho vay khách hàng</a:t>
+            </a:r>
+            <a:endParaRPr lang="vi-VN" sz="4000" dirty="0">
+              <a:solidFill>
+                <a:schemeClr val="bg1"/>
+              </a:solidFill>
+              <a:latin typeface="SVN-Gilroy XBold" panose="00000900000000000000" pitchFamily="50" charset="0"/>
+            </a:endParaRPr>
+          </a:p>
+        </p:txBody>
+      </p:sp>
+      <p:sp>
+        <p:nvSpPr>
+          <p:cNvPr id="2" name="TextBox 1">
+            <a:extLst>
+              <a:ext uri="{FF2B5EF4-FFF2-40B4-BE49-F238E27FC236}">
+                <a16:creationId xmlns:a16="http://schemas.microsoft.com/office/drawing/2014/main" id="{70BB23A5-EC1E-341E-EF08-A57BD2521AED}"/>
+              </a:ext>
+            </a:extLst>
+          </p:cNvPr>
+          <p:cNvSpPr txBox="1"/>
+          <p:nvPr/>
+        </p:nvSpPr>
+        <p:spPr>
+          <a:xfrm>
+            <a:off x="1429871" y="11654118"/>
+            <a:ext cx="7440705" cy="923330"/>
+          </a:xfrm>
+          <a:prstGeom prst="rect">
+            <a:avLst/>
+          </a:prstGeom>
+          <a:noFill/>
+        </p:spPr>
+        <p:txBody>
+          <a:bodyPr wrap="square" rtlCol="0">
+            <a:spAutoFit/>
+          </a:bodyPr>
+          <a:lstStyle/>
+          <a:p>
+            <a:r>
+              <a:rPr lang="en-US" dirty="0" err="1"/>
+              <a:t>Tăng trưởng cho vay khách hàng so với cùng kỳ. Đã 5 quý liên tiếp trên 30%. Nguồn: FiinProX (30/07/2026).</a:t>
+            </a:r>
+            <a:r>
+              <a:rPr lang="en-US" dirty="0"/>
+              <a:t/>
+            </a:r>
+            <a:r>
+              <a:rPr lang="en-US" dirty="0" err="1"/>
+              <a:t/>
+            </a:r>
+            <a:r>
+              <a:rPr lang="en-US" dirty="0"/>
+              <a:t/>
+            </a:r>
+            <a:r>
+              <a:rPr lang="en-US" dirty="0" err="1"/>
+              <a:t/>
+            </a:r>
+            <a:r>
+              <a:rPr lang="en-US" dirty="0"/>
+              <a:t/>
+            </a:r>
+            <a:r>
+              <a:rPr lang="en-US" dirty="0" err="1"/>
+              <a:t/>
+            </a:r>
+            <a:r>
+              <a:rPr lang="en-US" dirty="0"/>
+              <a:t/>
+            </a:r>
+            <a:r>
+              <a:rPr lang="en-US" dirty="0" err="1"/>
+              <a:t/>
+            </a:r>
+            <a:r>
+              <a:rPr lang="en-US" dirty="0"/>
+              <a:t/>
+            </a:r>
+            <a:r>
+              <a:rPr lang="en-US" dirty="0" err="1"/>
+              <a:t/>
+            </a:r>
+            <a:r>
+              <a:rPr lang="en-US" dirty="0"/>
+              <a:t/>
+            </a:r>
+            <a:r>
+              <a:rPr lang="en-US" dirty="0" err="1"/>
+              <a:t/>
+            </a:r>
+            <a:r>
+              <a:rPr lang="en-US" dirty="0"/>
+              <a:t/>
+            </a:r>
+            <a:r>
+              <a:rPr lang="en-US" dirty="0" err="1"/>
+              <a:t/>
+            </a:r>
+            <a:r>
+              <a:rPr lang="en-US" dirty="0"/>
+              <a:t/>
+            </a:r>
+            <a:r>
+              <a:rPr lang="en-US" dirty="0" err="1"/>
+              <a:t/>
+            </a:r>
+            <a:r>
+              <a:rPr lang="en-US" dirty="0"/>
+              <a:t/>
+            </a:r>
+            <a:r>
+              <a:rPr lang="en-US" dirty="0" err="1"/>
+              <a:t/>
+            </a:r>
+            <a:r>
+              <a:rPr lang="en-US" dirty="0"/>
+              <a:t/>
+            </a:r>
+            <a:r>
+              <a:rPr lang="en-US" dirty="0" err="1"/>
+              <a:t/>
+            </a:r>
+            <a:r>
+              <a:rPr lang="en-US" dirty="0"/>
+              <a:t/>
+            </a:r>
+            <a:r>
+              <a:rPr lang="en-US" dirty="0" err="1"/>
+              <a:t/>
+            </a:r>
+            <a:r>
+              <a:rPr lang="en-US" dirty="0"/>
+              <a:t/>
+            </a:r>
+            <a:r>
+              <a:rPr lang="en-US" dirty="0" err="1"/>
+              <a:t/>
+            </a:r>
+            <a:r>
+              <a:rPr lang="en-US" dirty="0"/>
+              <a:t/>
+            </a:r>
+            <a:r>
+              <a:rPr lang="en-US" dirty="0" err="1"/>
+              <a:t/>
+            </a:r>
+            <a:r>
+              <a:rPr lang="en-US" dirty="0"/>
+              <a:t/>
+            </a:r>
+            <a:r>
+              <a:rPr lang="en-US" dirty="0" err="1"/>
+              <a:t/>
+            </a:r>
+            <a:r>
+              <a:rPr lang="en-US" dirty="0"/>
+              <a:t/>
+            </a:r>
+            <a:r>
+              <a:rPr lang="en-US" dirty="0" err="1"/>
+              <a:t/>
+            </a:r>
+            <a:r>
+              <a:rPr lang="en-US" dirty="0"/>
+              <a:t/>
+            </a:r>
+            <a:r>
+              <a:rPr lang="en-US" dirty="0" err="1"/>
+              <a:t/>
+            </a:r>
+            <a:r>
+              <a:rPr lang="en-US" dirty="0"/>
+              <a:t/>
+            </a:r>
+            <a:r>
+              <a:rPr lang="en-US" dirty="0" err="1"/>
+              <a:t/>
+            </a:r>
+            <a:r>
+              <a:rPr lang="en-US" dirty="0"/>
+              <a:t/>
+            </a:r>
+            <a:r>
+              <a:rPr lang="en-US" dirty="0" err="1"/>
+              <a:t/>
+            </a:r>
+            <a:r>
+              <a:rPr lang="en-US" dirty="0"/>
+              <a:t/>
+            </a:r>
+            <a:r>
+              <a:rPr lang="en-US" dirty="0" err="1"/>
+              <a:t/>
+            </a:r>
+            <a:r>
+              <a:rPr lang="en-US" dirty="0"/>
+              <a:t/>
+            </a:r>
+            <a:r>
+              <a:rPr lang="en-US" dirty="0" err="1"/>
+              <a:t/>
+            </a:r>
+            <a:r>
+              <a:rPr lang="en-US" dirty="0"/>
+              <a:t/>
+            </a:r>
+            <a:r>
+              <a:rPr lang="en-US" dirty="0" err="1"/>
+              <a:t/>
+            </a:r>
+            <a:r>
+              <a:rPr lang="en-US" dirty="0"/>
+              <a:t/>
+            </a:r>
+            <a:r>
+              <a:rPr lang="en-US" dirty="0" err="1"/>
+              <a:t/>
+            </a:r>
+            <a:r>
+              <a:rPr lang="en-US" dirty="0"/>
+              <a:t/>
+            </a:r>
+          </a:p>
+        </p:txBody>
+      </p:sp>
+      <p:graphicFrame>
+        <p:nvGraphicFramePr>
+          <p:cNvPr id="10" name="Chart 9"/>
+          <p:cNvGraphicFramePr>
+            <a:graphicFrameLocks noGrp="1"/>
+          </p:cNvGraphicFramePr>
+          <p:nvPr/>
+        </p:nvGraphicFramePr>
+        <p:xfrm>
+          <a:off x="1200000" y="2514600"/>
+          <a:ext cx="8000000" cy="9271000"/>
         </p:xfrm>
         <a:graphic>
           <a:graphicData uri="http://schemas.openxmlformats.org/drawingml/2006/chart">

--- a/HotStock_VPB_31July2026.pptx
+++ b/HotStock_VPB_31July2026.pptx
@@ -401,10 +401,10 @@
                   <c:v>10200.0</c:v>
                 </c:pt>
                 <c:pt idx="4">
-                  <c:v>7920.0</c:v>
+                  <c:v>7921.0</c:v>
                 </c:pt>
                 <c:pt idx="5">
-                  <c:v>10960.0</c:v>
+                  <c:v>10959.0</c:v>
                 </c:pt>
               </c:numCache>
             </c:numRef>
@@ -694,7 +694,7 @@
             <c:bubble3D val="0"/>
             <c:spPr>
               <a:solidFill>
-                <a:srgbClr val="0F5FA8"/>
+                <a:srgbClr val="C7811F"/>
               </a:solidFill>
               <a:ln>
                 <a:noFill/>
@@ -708,7 +708,7 @@
             <c:bubble3D val="0"/>
             <c:spPr>
               <a:solidFill>
-                <a:srgbClr val="0F5FA8"/>
+                <a:srgbClr val="C7811F"/>
               </a:solidFill>
               <a:ln>
                 <a:noFill/>
@@ -722,7 +722,7 @@
             <c:bubble3D val="0"/>
             <c:spPr>
               <a:solidFill>
-                <a:srgbClr val="0F5FA8"/>
+                <a:srgbClr val="C7811F"/>
               </a:solidFill>
               <a:ln>
                 <a:noFill/>
@@ -736,7 +736,7 @@
             <c:bubble3D val="0"/>
             <c:spPr>
               <a:solidFill>
-                <a:srgbClr val="0F5FA8"/>
+                <a:srgbClr val="C7811F"/>
               </a:solidFill>
               <a:ln>
                 <a:noFill/>
@@ -750,6 +750,62 @@
             <c:bubble3D val="0"/>
             <c:spPr>
               <a:solidFill>
+                <a:srgbClr val="C7811F"/>
+              </a:solidFill>
+              <a:ln>
+                <a:noFill/>
+              </a:ln>
+              <a:effectLst/>
+            </c:spPr>
+          </c:dPt>
+          <c:dPt>
+            <c:idx val="9"/>
+            <c:invertIfNegative val="0"/>
+            <c:bubble3D val="0"/>
+            <c:spPr>
+              <a:solidFill>
+                <a:srgbClr val="C7811F"/>
+              </a:solidFill>
+              <a:ln>
+                <a:noFill/>
+              </a:ln>
+              <a:effectLst/>
+            </c:spPr>
+          </c:dPt>
+          <c:dPt>
+            <c:idx val="10"/>
+            <c:invertIfNegative val="0"/>
+            <c:bubble3D val="0"/>
+            <c:spPr>
+              <a:solidFill>
+                <a:srgbClr val="C7811F"/>
+              </a:solidFill>
+              <a:ln>
+                <a:noFill/>
+              </a:ln>
+              <a:effectLst/>
+            </c:spPr>
+          </c:dPt>
+          <c:dPt>
+            <c:idx val="11"/>
+            <c:invertIfNegative val="0"/>
+            <c:bubble3D val="0"/>
+            <c:spPr>
+              <a:solidFill>
+                <a:srgbClr val="C7811F"/>
+              </a:solidFill>
+              <a:ln>
+                <a:noFill/>
+              </a:ln>
+              <a:effectLst/>
+            </c:spPr>
+          </c:dPt>
+          <c:dPt>
+            <c:idx val="12"/>
+            <c:invertIfNegative val="0"/>
+            <c:bubble3D val="0"/>
+            <c:spPr>
+              <a:solidFill>
                 <a:srgbClr val="0F5FA8"/>
               </a:solidFill>
               <a:ln>
@@ -759,7 +815,7 @@
             </c:spPr>
           </c:dPt>
           <c:dPt>
-            <c:idx val="9"/>
+            <c:idx val="13"/>
             <c:invertIfNegative val="0"/>
             <c:bubble3D val="0"/>
             <c:spPr>
@@ -786,7 +842,7 @@
               <a:lstStyle/>
               <a:p>
                 <a:pPr>
-                  <a:defRPr sz="1300" b="1" i="0" u="none" strike="noStrike" kern="1200" baseline="0">
+                  <a:defRPr sz="1100" b="1" i="0" u="none" strike="noStrike" kern="1200" baseline="0">
                     <a:solidFill>
                       <a:srgbClr val="595959"/>
                     </a:solidFill>
@@ -808,37 +864,49 @@
           </c:dLbls>
           <c:cat>
             <c:strRef>
-              <c:f>Sheet1!$B$1:$K$1</c:f>
+              <c:f>Sheet1!$B$1:$O$1</c:f>
               <c:strCache>
-                <c:ptCount val="10"/>
+                <c:ptCount val="14"/>
                 <c:pt idx="0">
+                  <c:v>Q1/23</c:v>
+                </c:pt>
+                <c:pt idx="1">
+                  <c:v>Q2/23</c:v>
+                </c:pt>
+                <c:pt idx="2">
+                  <c:v>Q3/23</c:v>
+                </c:pt>
+                <c:pt idx="3">
+                  <c:v>Q4/23</c:v>
+                </c:pt>
+                <c:pt idx="4">
                   <c:v>Q1/24</c:v>
                 </c:pt>
-                <c:pt idx="1">
+                <c:pt idx="5">
                   <c:v>Q2/24</c:v>
                 </c:pt>
-                <c:pt idx="2">
+                <c:pt idx="6">
                   <c:v>Q3/24</c:v>
                 </c:pt>
-                <c:pt idx="3">
+                <c:pt idx="7">
                   <c:v>Q4/24</c:v>
                 </c:pt>
-                <c:pt idx="4">
+                <c:pt idx="8">
                   <c:v>Q1/25</c:v>
                 </c:pt>
-                <c:pt idx="5">
+                <c:pt idx="9">
                   <c:v>Q2/25</c:v>
                 </c:pt>
-                <c:pt idx="6">
+                <c:pt idx="10">
                   <c:v>Q3/25</c:v>
                 </c:pt>
-                <c:pt idx="7">
+                <c:pt idx="11">
                   <c:v>Q4/25</c:v>
                 </c:pt>
-                <c:pt idx="8">
+                <c:pt idx="12">
                   <c:v>Q1/26</c:v>
                 </c:pt>
-                <c:pt idx="9">
+                <c:pt idx="13">
                   <c:v>Q2/26</c:v>
                 </c:pt>
               </c:strCache>
@@ -846,45 +914,57 @@
           </c:cat>
           <c:val>
             <c:numRef>
-              <c:f>Sheet1!$B$2:$K$2</c:f>
+              <c:f>Sheet1!$B$2:$O$2</c:f>
               <c:numCache>
                 <c:formatCode>0.0"%"</c:formatCode>
-                <c:ptCount val="10"/>
+                <c:ptCount val="14"/>
                 <c:pt idx="0">
+                  <c:v>6.43</c:v>
+                </c:pt>
+                <c:pt idx="1">
+                  <c:v>6.71</c:v>
+                </c:pt>
+                <c:pt idx="2">
+                  <c:v>5.88</c:v>
+                </c:pt>
+                <c:pt idx="3">
+                  <c:v>5.14</c:v>
+                </c:pt>
+                <c:pt idx="4">
                   <c:v>4.96</c:v>
                 </c:pt>
-                <c:pt idx="1">
+                <c:pt idx="5">
                   <c:v>5.21</c:v>
                 </c:pt>
-                <c:pt idx="2">
+                <c:pt idx="6">
                   <c:v>4.93</c:v>
                 </c:pt>
-                <c:pt idx="3">
+                <c:pt idx="7">
                   <c:v>4.3</c:v>
                 </c:pt>
-                <c:pt idx="4">
+                <c:pt idx="8">
                   <c:v>4.85</c:v>
                 </c:pt>
-                <c:pt idx="5">
+                <c:pt idx="9">
                   <c:v>4.06</c:v>
                 </c:pt>
-                <c:pt idx="6">
+                <c:pt idx="10">
                   <c:v>3.58</c:v>
                 </c:pt>
-                <c:pt idx="7">
+                <c:pt idx="11">
                   <c:v>3.4</c:v>
                 </c:pt>
-                <c:pt idx="8">
+                <c:pt idx="12">
                   <c:v>3.65</c:v>
                 </c:pt>
-                <c:pt idx="9">
+                <c:pt idx="13">
                   <c:v>3.34</c:v>
                 </c:pt>
               </c:numCache>
             </c:numRef>
           </c:val>
         </c:ser>
-        <c:gapWidth val="55"/>
+        <c:gapWidth val="45"/>
         <c:overlap val="-27"/>
         <c:axId val="811334001"/>
         <c:axId val="811334002"/>
@@ -915,7 +995,7 @@
           <a:lstStyle/>
           <a:p>
             <a:pPr>
-              <a:defRPr sz="1200" b="0" i="0" u="none" strike="noStrike" kern="1200" baseline="0">
+              <a:defRPr sz="1000" b="0" i="0" u="none" strike="noStrike" kern="1200" baseline="0">
                 <a:solidFill>
                   <a:srgbClr val="595959"/>
                 </a:solidFill>
@@ -973,7 +1053,7 @@
         <c:crossAx val="811334001"/>
         <c:crosses val="autoZero"/>
         <c:crossBetween val="between"/>
-        <c:majorUnit val="1.0"/>
+        <c:majorUnit val="2.0"/>
       </c:valAx>
       <c:spPr>
         <a:noFill/>
@@ -1171,7 +1251,7 @@
             <c:bubble3D val="0"/>
             <c:spPr>
               <a:solidFill>
-                <a:srgbClr val="0F5FA8"/>
+                <a:srgbClr val="C7811F"/>
               </a:solidFill>
               <a:ln>
                 <a:noFill/>
@@ -1185,7 +1265,7 @@
             <c:bubble3D val="0"/>
             <c:spPr>
               <a:solidFill>
-                <a:srgbClr val="0F5FA8"/>
+                <a:srgbClr val="C7811F"/>
               </a:solidFill>
               <a:ln>
                 <a:noFill/>
@@ -1199,7 +1279,7 @@
             <c:bubble3D val="0"/>
             <c:spPr>
               <a:solidFill>
-                <a:srgbClr val="0F5FA8"/>
+                <a:srgbClr val="C7811F"/>
               </a:solidFill>
               <a:ln>
                 <a:noFill/>
@@ -1213,7 +1293,7 @@
             <c:bubble3D val="0"/>
             <c:spPr>
               <a:solidFill>
-                <a:srgbClr val="0F5FA8"/>
+                <a:srgbClr val="C7811F"/>
               </a:solidFill>
               <a:ln>
                 <a:noFill/>
@@ -1227,6 +1307,62 @@
             <c:bubble3D val="0"/>
             <c:spPr>
               <a:solidFill>
+                <a:srgbClr val="C7811F"/>
+              </a:solidFill>
+              <a:ln>
+                <a:noFill/>
+              </a:ln>
+              <a:effectLst/>
+            </c:spPr>
+          </c:dPt>
+          <c:dPt>
+            <c:idx val="9"/>
+            <c:invertIfNegative val="0"/>
+            <c:bubble3D val="0"/>
+            <c:spPr>
+              <a:solidFill>
+                <a:srgbClr val="C7811F"/>
+              </a:solidFill>
+              <a:ln>
+                <a:noFill/>
+              </a:ln>
+              <a:effectLst/>
+            </c:spPr>
+          </c:dPt>
+          <c:dPt>
+            <c:idx val="10"/>
+            <c:invertIfNegative val="0"/>
+            <c:bubble3D val="0"/>
+            <c:spPr>
+              <a:solidFill>
+                <a:srgbClr val="C7811F"/>
+              </a:solidFill>
+              <a:ln>
+                <a:noFill/>
+              </a:ln>
+              <a:effectLst/>
+            </c:spPr>
+          </c:dPt>
+          <c:dPt>
+            <c:idx val="11"/>
+            <c:invertIfNegative val="0"/>
+            <c:bubble3D val="0"/>
+            <c:spPr>
+              <a:solidFill>
+                <a:srgbClr val="C7811F"/>
+              </a:solidFill>
+              <a:ln>
+                <a:noFill/>
+              </a:ln>
+              <a:effectLst/>
+            </c:spPr>
+          </c:dPt>
+          <c:dPt>
+            <c:idx val="12"/>
+            <c:invertIfNegative val="0"/>
+            <c:bubble3D val="0"/>
+            <c:spPr>
+              <a:solidFill>
                 <a:srgbClr val="0F5FA8"/>
               </a:solidFill>
               <a:ln>
@@ -1236,7 +1372,7 @@
             </c:spPr>
           </c:dPt>
           <c:dPt>
-            <c:idx val="9"/>
+            <c:idx val="13"/>
             <c:invertIfNegative val="0"/>
             <c:bubble3D val="0"/>
             <c:spPr>
@@ -1263,7 +1399,7 @@
               <a:lstStyle/>
               <a:p>
                 <a:pPr>
-                  <a:defRPr sz="1300" b="1" i="0" u="none" strike="noStrike" kern="1200" baseline="0">
+                  <a:defRPr sz="1100" b="1" i="0" u="none" strike="noStrike" kern="1200" baseline="0">
                     <a:solidFill>
                       <a:srgbClr val="595959"/>
                     </a:solidFill>
@@ -1285,37 +1421,49 @@
           </c:dLbls>
           <c:cat>
             <c:strRef>
-              <c:f>Sheet1!$B$1:$K$1</c:f>
+              <c:f>Sheet1!$B$1:$O$1</c:f>
               <c:strCache>
-                <c:ptCount val="10"/>
+                <c:ptCount val="14"/>
                 <c:pt idx="0">
+                  <c:v>Q1/23</c:v>
+                </c:pt>
+                <c:pt idx="1">
+                  <c:v>Q2/23</c:v>
+                </c:pt>
+                <c:pt idx="2">
+                  <c:v>Q3/23</c:v>
+                </c:pt>
+                <c:pt idx="3">
+                  <c:v>Q4/23</c:v>
+                </c:pt>
+                <c:pt idx="4">
                   <c:v>Q1/24</c:v>
                 </c:pt>
-                <c:pt idx="1">
+                <c:pt idx="5">
                   <c:v>Q2/24</c:v>
                 </c:pt>
-                <c:pt idx="2">
+                <c:pt idx="6">
                   <c:v>Q3/24</c:v>
                 </c:pt>
-                <c:pt idx="3">
+                <c:pt idx="7">
                   <c:v>Q4/24</c:v>
                 </c:pt>
-                <c:pt idx="4">
+                <c:pt idx="8">
                   <c:v>Q1/25</c:v>
                 </c:pt>
-                <c:pt idx="5">
+                <c:pt idx="9">
                   <c:v>Q2/25</c:v>
                 </c:pt>
-                <c:pt idx="6">
+                <c:pt idx="10">
                   <c:v>Q3/25</c:v>
                 </c:pt>
-                <c:pt idx="7">
+                <c:pt idx="11">
                   <c:v>Q4/25</c:v>
                 </c:pt>
-                <c:pt idx="8">
+                <c:pt idx="12">
                   <c:v>Q1/26</c:v>
                 </c:pt>
-                <c:pt idx="9">
+                <c:pt idx="13">
                   <c:v>Q2/26</c:v>
                 </c:pt>
               </c:strCache>
@@ -1323,45 +1471,57 @@
           </c:cat>
           <c:val>
             <c:numRef>
-              <c:f>Sheet1!$B$2:$K$2</c:f>
+              <c:f>Sheet1!$B$2:$O$2</c:f>
               <c:numCache>
                 <c:formatCode>0.0"%"</c:formatCode>
-                <c:ptCount val="10"/>
+                <c:ptCount val="14"/>
                 <c:pt idx="0">
+                  <c:v>24.03</c:v>
+                </c:pt>
+                <c:pt idx="1">
+                  <c:v>25.08</c:v>
+                </c:pt>
+                <c:pt idx="2">
+                  <c:v>30.42</c:v>
+                </c:pt>
+                <c:pt idx="3">
+                  <c:v>29.9</c:v>
+                </c:pt>
+                <c:pt idx="4">
                   <c:v>26.1</c:v>
                 </c:pt>
-                <c:pt idx="1">
+                <c:pt idx="5">
                   <c:v>28.23</c:v>
                 </c:pt>
-                <c:pt idx="2">
+                <c:pt idx="6">
                   <c:v>21.83</c:v>
                 </c:pt>
-                <c:pt idx="3">
+                <c:pt idx="7">
                   <c:v>23.53</c:v>
                 </c:pt>
-                <c:pt idx="4">
+                <c:pt idx="8">
                   <c:v>25.71</c:v>
                 </c:pt>
-                <c:pt idx="5">
+                <c:pt idx="9">
                   <c:v>33.32</c:v>
                 </c:pt>
-                <c:pt idx="6">
+                <c:pt idx="10">
                   <c:v>41.82</c:v>
                 </c:pt>
-                <c:pt idx="7">
+                <c:pt idx="11">
                   <c:v>35.97</c:v>
                 </c:pt>
-                <c:pt idx="8">
+                <c:pt idx="12">
                   <c:v>43.12</c:v>
                 </c:pt>
-                <c:pt idx="9">
+                <c:pt idx="13">
                   <c:v>40.41</c:v>
                 </c:pt>
               </c:numCache>
             </c:numRef>
           </c:val>
         </c:ser>
-        <c:gapWidth val="55"/>
+        <c:gapWidth val="45"/>
         <c:overlap val="-27"/>
         <c:axId val="811334003"/>
         <c:axId val="811334004"/>
@@ -1392,7 +1552,7 @@
           <a:lstStyle/>
           <a:p>
             <a:pPr>
-              <a:defRPr sz="1200" b="0" i="0" u="none" strike="noStrike" kern="1200" baseline="0">
+              <a:defRPr sz="1000" b="0" i="0" u="none" strike="noStrike" kern="1200" baseline="0">
                 <a:solidFill>
                   <a:srgbClr val="595959"/>
                 </a:solidFill>
@@ -3416,7 +3576,7 @@
               </a:solidFill>
               <a:latin typeface="SVN-Gilroy" panose="00000500000000000000"/>
             </a:rPr>
-            <a:t>- Nền so sánh 2H25 cao (LNTT 2H25 ~19,400 tỷ) nên tốc độ tăng sẽ chậm lại rõ trong 2H26</a:t>
+            <a:t>- Nền 2H25 cao (LNTT 2H25 ~19,360 tỷ): 2H26 chỉ cần +16% là đủ kế hoạch, nên tốc độ tăng công bố sẽ chậm lại rõ</a:t>
           </a:r>
           <a:r>
             <a:rPr lang="vi-VN" sz="2900" b="0" dirty="0">
@@ -4947,7 +5107,7 @@
               </a:solidFill>
               <a:latin typeface="SVN-Gilroy" panose="00000500000000000000"/>
             </a:rPr>
-            <a:t>- Nền so sánh 2H25 cao (LNTT 2H25 ~19,400 tỷ) nên tốc độ tăng sẽ chậm lại rõ trong 2H26</a:t>
+            <a:t>- Nền 2H25 cao (LNTT 2H25 ~19,360 tỷ): 2H26 chỉ cần +16% là đủ kế hoạch, nên tốc độ tăng công bố sẽ chậm lại rõ</a:t>
           </a:r>
           <a:r>
             <a:rPr lang="vi-VN" sz="2900" b="0" kern="1200" dirty="0">
@@ -10319,7 +10479,7 @@
           <a:p>
             <a:r>
               <a:rPr lang="en-US" dirty="0" err="1"/>
-              <a:t>Nợ xấu nhóm 3–5 trên tổng dư nợ. Từ đỉnh 6.7% quý 2/2023, tỷ lệ này đã giảm một nửa và hiện là mức thấp nhất kể từ 2020. Nguồn: FiinProX (30/07/2026).</a:t>
+              <a:t>Nợ xấu nhóm 3–5 trên tổng dư nợ. Từ đỉnh 6.71% quý 2/2023, tỷ lệ này đã giảm một nửa và hiện là mức thấp nhất kể từ quý 2/2020. Nguồn: FiinProX (30/07/2026).</a:t>
             </a:r>
             <a:r>
               <a:rPr lang="en-US" dirty="0"/>
@@ -10852,7 +11012,7 @@
           <a:p>
             <a:r>
               <a:rPr lang="en-US" dirty="0" err="1"/>
-              <a:t>Tăng trưởng cho vay khách hàng so với cùng kỳ. Đã 5 quý liên tiếp trên 30%. Nguồn: FiinProX (30/07/2026).</a:t>
+              <a:t>Tăng trưởng cho vay khách hàng so với cùng kỳ. Đã 5 quý liên tiếp trên 30%, nhanh hơn hẳn giai đoạn 2023-2024. Nguồn: FiinProX (30/07/2026).</a:t>
             </a:r>
             <a:r>
               <a:rPr lang="en-US" dirty="0"/>
@@ -12480,7 +12640,7 @@
           <a:p>
             <a:r>
               <a:rPr lang="en-US" dirty="0" err="1"/>
-              <a:t>Nguồn: VPBank, MAS tổng hợp. Q3/25 và Q4/25 được suy ra từ số liệu lũy kế 9T/25 (20,400 tỷ) và cả năm 2025 (30,600 tỷ) nên đã làm tròn.</a:t>
+              <a:t>Nguồn: VPBank, MAS tổng hợp. Q1/25-Q4/25 suy ra từ số liệu lũy kế 9T/25 (20,400 tỷ) và cả năm 2025 (30,600 tỷ) nên đã làm tròn; Q1/26 và Q2/26 là số công bố.</a:t>
             </a:r>
             <a:r>
               <a:rPr lang="en-US" dirty="0"/>
